--- a/Lec_4/Lec_4_Модуль 4_1_Слайд-конспект.pptx
+++ b/Lec_4/Lec_4_Модуль 4_1_Слайд-конспект.pptx
@@ -1,6 +1,6 @@
 
 <file path=ppt/presentation.xml><?xml version="1.0" encoding="utf-8"?>
-<p:presentation xmlns:a="http://schemas.openxmlformats.org/drawingml/2006/main" xmlns:p="http://schemas.openxmlformats.org/presentationml/2006/main" xmlns:r="http://schemas.openxmlformats.org/officeDocument/2006/relationships" autoCompressPictures="0" saveSubsetFonts="1">
+<p:presentation xmlns:a="http://schemas.openxmlformats.org/drawingml/2006/main" xmlns:r="http://schemas.openxmlformats.org/officeDocument/2006/relationships" xmlns:p="http://schemas.openxmlformats.org/presentationml/2006/main" saveSubsetFonts="1" autoCompressPictures="0">
   <p:sldMasterIdLst>
     <p:sldMasterId id="2147483648" r:id="rId1"/>
   </p:sldMasterIdLst>
@@ -16,7 +16,6 @@
     <p:sldId id="264" r:id="rId10"/>
     <p:sldId id="265" r:id="rId11"/>
     <p:sldId id="266" r:id="rId12"/>
-    <p:sldId id="267" r:id="rId13"/>
   </p:sldIdLst>
   <p:sldSz cx="9144000" cy="5143500" type="screen16x9"/>
   <p:notesSz cx="6858000" cy="9144000"/>
@@ -24,8 +23,8 @@
     <a:defPPr>
       <a:defRPr lang="en-US"/>
     </a:defPPr>
-    <a:lvl1pPr algn="l" defTabSz="457200" eaLnBrk="1" hangingPunct="1" latinLnBrk="0" marL="0" rtl="0">
-      <a:defRPr kern="1200" sz="1800">
+    <a:lvl1pPr marL="0" algn="l" defTabSz="457200" rtl="0" eaLnBrk="1" latinLnBrk="0" hangingPunct="1">
+      <a:defRPr sz="1800" kern="1200">
         <a:solidFill>
           <a:schemeClr val="tx1"/>
         </a:solidFill>
@@ -34,8 +33,8 @@
         <a:cs typeface="+mn-cs"/>
       </a:defRPr>
     </a:lvl1pPr>
-    <a:lvl2pPr algn="l" defTabSz="457200" eaLnBrk="1" hangingPunct="1" latinLnBrk="0" marL="457200" rtl="0">
-      <a:defRPr kern="1200" sz="1800">
+    <a:lvl2pPr marL="457200" algn="l" defTabSz="457200" rtl="0" eaLnBrk="1" latinLnBrk="0" hangingPunct="1">
+      <a:defRPr sz="1800" kern="1200">
         <a:solidFill>
           <a:schemeClr val="tx1"/>
         </a:solidFill>
@@ -44,8 +43,8 @@
         <a:cs typeface="+mn-cs"/>
       </a:defRPr>
     </a:lvl2pPr>
-    <a:lvl3pPr algn="l" defTabSz="457200" eaLnBrk="1" hangingPunct="1" latinLnBrk="0" marL="914400" rtl="0">
-      <a:defRPr kern="1200" sz="1800">
+    <a:lvl3pPr marL="914400" algn="l" defTabSz="457200" rtl="0" eaLnBrk="1" latinLnBrk="0" hangingPunct="1">
+      <a:defRPr sz="1800" kern="1200">
         <a:solidFill>
           <a:schemeClr val="tx1"/>
         </a:solidFill>
@@ -54,8 +53,8 @@
         <a:cs typeface="+mn-cs"/>
       </a:defRPr>
     </a:lvl3pPr>
-    <a:lvl4pPr algn="l" defTabSz="457200" eaLnBrk="1" hangingPunct="1" latinLnBrk="0" marL="1371600" rtl="0">
-      <a:defRPr kern="1200" sz="1800">
+    <a:lvl4pPr marL="1371600" algn="l" defTabSz="457200" rtl="0" eaLnBrk="1" latinLnBrk="0" hangingPunct="1">
+      <a:defRPr sz="1800" kern="1200">
         <a:solidFill>
           <a:schemeClr val="tx1"/>
         </a:solidFill>
@@ -64,8 +63,8 @@
         <a:cs typeface="+mn-cs"/>
       </a:defRPr>
     </a:lvl4pPr>
-    <a:lvl5pPr algn="l" defTabSz="457200" eaLnBrk="1" hangingPunct="1" latinLnBrk="0" marL="1828800" rtl="0">
-      <a:defRPr kern="1200" sz="1800">
+    <a:lvl5pPr marL="1828800" algn="l" defTabSz="457200" rtl="0" eaLnBrk="1" latinLnBrk="0" hangingPunct="1">
+      <a:defRPr sz="1800" kern="1200">
         <a:solidFill>
           <a:schemeClr val="tx1"/>
         </a:solidFill>
@@ -74,8 +73,8 @@
         <a:cs typeface="+mn-cs"/>
       </a:defRPr>
     </a:lvl5pPr>
-    <a:lvl6pPr algn="l" defTabSz="457200" eaLnBrk="1" hangingPunct="1" latinLnBrk="0" marL="2286000" rtl="0">
-      <a:defRPr kern="1200" sz="1800">
+    <a:lvl6pPr marL="2286000" algn="l" defTabSz="457200" rtl="0" eaLnBrk="1" latinLnBrk="0" hangingPunct="1">
+      <a:defRPr sz="1800" kern="1200">
         <a:solidFill>
           <a:schemeClr val="tx1"/>
         </a:solidFill>
@@ -84,8 +83,8 @@
         <a:cs typeface="+mn-cs"/>
       </a:defRPr>
     </a:lvl6pPr>
-    <a:lvl7pPr algn="l" defTabSz="457200" eaLnBrk="1" hangingPunct="1" latinLnBrk="0" marL="2743200" rtl="0">
-      <a:defRPr kern="1200" sz="1800">
+    <a:lvl7pPr marL="2743200" algn="l" defTabSz="457200" rtl="0" eaLnBrk="1" latinLnBrk="0" hangingPunct="1">
+      <a:defRPr sz="1800" kern="1200">
         <a:solidFill>
           <a:schemeClr val="tx1"/>
         </a:solidFill>
@@ -94,8 +93,8 @@
         <a:cs typeface="+mn-cs"/>
       </a:defRPr>
     </a:lvl7pPr>
-    <a:lvl8pPr algn="l" defTabSz="457200" eaLnBrk="1" hangingPunct="1" latinLnBrk="0" marL="3200400" rtl="0">
-      <a:defRPr kern="1200" sz="1800">
+    <a:lvl8pPr marL="3200400" algn="l" defTabSz="457200" rtl="0" eaLnBrk="1" latinLnBrk="0" hangingPunct="1">
+      <a:defRPr sz="1800" kern="1200">
         <a:solidFill>
           <a:schemeClr val="tx1"/>
         </a:solidFill>
@@ -104,8 +103,8 @@
         <a:cs typeface="+mn-cs"/>
       </a:defRPr>
     </a:lvl8pPr>
-    <a:lvl9pPr algn="l" defTabSz="457200" eaLnBrk="1" hangingPunct="1" latinLnBrk="0" marL="3657600" rtl="0">
-      <a:defRPr kern="1200" sz="1800">
+    <a:lvl9pPr marL="3657600" algn="l" defTabSz="457200" rtl="0" eaLnBrk="1" latinLnBrk="0" hangingPunct="1">
+      <a:defRPr sz="1800" kern="1200">
         <a:solidFill>
           <a:schemeClr val="tx1"/>
         </a:solidFill>
@@ -344,7 +343,7 @@
           <a:p>
             <a:fld id="{241EB5C9-1307-BA42-ABA2-0BC069CD8E7F}" type="datetimeFigureOut">
               <a:rPr lang="en-US" smtClean="0"/>
-              <a:t>10/6/2026</a:t>
+              <a:t>10/27/2026</a:t>
             </a:fld>
             <a:endParaRPr lang="en-US"/>
           </a:p>
@@ -512,7 +511,7 @@
           <a:p>
             <a:fld id="{241EB5C9-1307-BA42-ABA2-0BC069CD8E7F}" type="datetimeFigureOut">
               <a:rPr lang="en-US" smtClean="0"/>
-              <a:t>10/6/2026</a:t>
+              <a:t>10/27/2026</a:t>
             </a:fld>
             <a:endParaRPr lang="en-US"/>
           </a:p>
@@ -690,7 +689,7 @@
           <a:p>
             <a:fld id="{241EB5C9-1307-BA42-ABA2-0BC069CD8E7F}" type="datetimeFigureOut">
               <a:rPr lang="en-US" smtClean="0"/>
-              <a:t>10/6/2026</a:t>
+              <a:t>10/27/2026</a:t>
             </a:fld>
             <a:endParaRPr lang="en-US"/>
           </a:p>
@@ -858,7 +857,7 @@
           <a:p>
             <a:fld id="{241EB5C9-1307-BA42-ABA2-0BC069CD8E7F}" type="datetimeFigureOut">
               <a:rPr lang="en-US" smtClean="0"/>
-              <a:t>10/6/2026</a:t>
+              <a:t>10/27/2026</a:t>
             </a:fld>
             <a:endParaRPr lang="en-US"/>
           </a:p>
@@ -1103,7 +1102,7 @@
           <a:p>
             <a:fld id="{241EB5C9-1307-BA42-ABA2-0BC069CD8E7F}" type="datetimeFigureOut">
               <a:rPr lang="en-US" smtClean="0"/>
-              <a:t>10/6/2026</a:t>
+              <a:t>10/27/2026</a:t>
             </a:fld>
             <a:endParaRPr lang="en-US"/>
           </a:p>
@@ -1419,7 +1418,7 @@
           <a:p>
             <a:fld id="{241EB5C9-1307-BA42-ABA2-0BC069CD8E7F}" type="datetimeFigureOut">
               <a:rPr lang="en-US" smtClean="0"/>
-              <a:t>10/6/2026</a:t>
+              <a:t>10/27/2026</a:t>
             </a:fld>
             <a:endParaRPr lang="en-US"/>
           </a:p>
@@ -1838,7 +1837,7 @@
           <a:p>
             <a:fld id="{241EB5C9-1307-BA42-ABA2-0BC069CD8E7F}" type="datetimeFigureOut">
               <a:rPr lang="en-US" smtClean="0"/>
-              <a:t>10/6/2026</a:t>
+              <a:t>10/27/2026</a:t>
             </a:fld>
             <a:endParaRPr lang="en-US"/>
           </a:p>
@@ -1955,7 +1954,7 @@
           <a:p>
             <a:fld id="{241EB5C9-1307-BA42-ABA2-0BC069CD8E7F}" type="datetimeFigureOut">
               <a:rPr lang="en-US" smtClean="0"/>
-              <a:t>10/6/2026</a:t>
+              <a:t>10/27/2026</a:t>
             </a:fld>
             <a:endParaRPr lang="en-US"/>
           </a:p>
@@ -2081,7 +2080,7 @@
           <a:p>
             <a:fld id="{241EB5C9-1307-BA42-ABA2-0BC069CD8E7F}" type="datetimeFigureOut">
               <a:rPr lang="en-US" smtClean="0"/>
-              <a:t>10/6/2026</a:t>
+              <a:t>10/27/2026</a:t>
             </a:fld>
             <a:endParaRPr lang="en-US"/>
           </a:p>
@@ -2356,7 +2355,7 @@
           <a:p>
             <a:fld id="{241EB5C9-1307-BA42-ABA2-0BC069CD8E7F}" type="datetimeFigureOut">
               <a:rPr lang="en-US" smtClean="0"/>
-              <a:t>10/6/2026</a:t>
+              <a:t>10/27/2026</a:t>
             </a:fld>
             <a:endParaRPr lang="en-US"/>
           </a:p>
@@ -2608,7 +2607,7 @@
           <a:p>
             <a:fld id="{241EB5C9-1307-BA42-ABA2-0BC069CD8E7F}" type="datetimeFigureOut">
               <a:rPr lang="en-US" smtClean="0"/>
-              <a:t>10/6/2026</a:t>
+              <a:t>10/27/2026</a:t>
             </a:fld>
             <a:endParaRPr lang="en-US"/>
           </a:p>
@@ -2670,7 +2669,7 @@
 </file>
 
 <file path=ppt/slideMasters/slideMaster1.xml><?xml version="1.0" encoding="utf-8"?>
-<p:sldMaster xmlns:a="http://schemas.openxmlformats.org/drawingml/2006/main" xmlns:p="http://schemas.openxmlformats.org/presentationml/2006/main" xmlns:r="http://schemas.openxmlformats.org/officeDocument/2006/relationships">
+<p:sldMaster xmlns:a="http://schemas.openxmlformats.org/drawingml/2006/main" xmlns:r="http://schemas.openxmlformats.org/officeDocument/2006/relationships" xmlns:p="http://schemas.openxmlformats.org/presentationml/2006/main">
   <p:cSld>
     <p:bg>
       <p:bgRef idx="1001">
@@ -2711,13 +2710,13 @@
           </a:prstGeom>
         </p:spPr>
         <p:txBody>
-          <a:bodyPr anchor="ctr" bIns="45720" lIns="91440" rIns="91440" rtlCol="0" tIns="45720" vert="horz">
+          <a:bodyPr vert="horz" lIns="91440" tIns="45720" rIns="91440" bIns="45720" rtlCol="0" anchor="ctr">
             <a:normAutofit/>
           </a:bodyPr>
           <a:lstStyle/>
           <a:p>
             <a:r>
-              <a:rPr dirty="0" lang="en-US"/>
+              <a:rPr lang="en-US" dirty="0"/>
               <a:t>Click to edit Master title style</a:t>
             </a:r>
           </a:p>
@@ -2730,7 +2729,7 @@
             <a:spLocks noGrp="1"/>
           </p:cNvSpPr>
           <p:nvPr>
-            <p:ph idx="1" type="body"/>
+            <p:ph type="body" idx="1"/>
           </p:nvPr>
         </p:nvSpPr>
         <p:spPr>
@@ -2743,42 +2742,42 @@
           </a:prstGeom>
         </p:spPr>
         <p:txBody>
-          <a:bodyPr bIns="45720" lIns="91440" rIns="91440" rtlCol="0" tIns="45720" vert="horz">
+          <a:bodyPr vert="horz" lIns="91440" tIns="45720" rIns="91440" bIns="45720" rtlCol="0">
             <a:normAutofit/>
           </a:bodyPr>
           <a:lstStyle/>
           <a:p>
             <a:pPr lvl="0"/>
             <a:r>
-              <a:rPr dirty="0" lang="en-US"/>
+              <a:rPr lang="en-US" dirty="0"/>
               <a:t>Click to edit Master text styles</a:t>
             </a:r>
           </a:p>
           <a:p>
             <a:pPr lvl="1"/>
             <a:r>
-              <a:rPr dirty="0" lang="en-US"/>
+              <a:rPr lang="en-US" dirty="0"/>
               <a:t>Second level</a:t>
             </a:r>
           </a:p>
           <a:p>
             <a:pPr lvl="2"/>
             <a:r>
-              <a:rPr dirty="0" lang="en-US"/>
+              <a:rPr lang="en-US" dirty="0"/>
               <a:t>Third level</a:t>
             </a:r>
           </a:p>
           <a:p>
             <a:pPr lvl="3"/>
             <a:r>
-              <a:rPr dirty="0" lang="en-US"/>
+              <a:rPr lang="en-US" dirty="0"/>
               <a:t>Fourth level</a:t>
             </a:r>
           </a:p>
           <a:p>
             <a:pPr lvl="4"/>
             <a:r>
-              <a:rPr dirty="0" lang="en-US"/>
+              <a:rPr lang="en-US" dirty="0"/>
               <a:t>Fifth level</a:t>
             </a:r>
           </a:p>
@@ -2791,7 +2790,7 @@
             <a:spLocks noGrp="1"/>
           </p:cNvSpPr>
           <p:nvPr>
-            <p:ph idx="2" sz="half" type="dt"/>
+            <p:ph type="dt" sz="half" idx="2"/>
           </p:nvPr>
         </p:nvSpPr>
         <p:spPr>
@@ -2804,7 +2803,7 @@
           </a:prstGeom>
         </p:spPr>
         <p:txBody>
-          <a:bodyPr anchor="ctr" bIns="45720" lIns="91440" rIns="91440" rtlCol="0" tIns="45720" vert="horz"/>
+          <a:bodyPr vert="horz" lIns="91440" tIns="45720" rIns="91440" bIns="45720" rtlCol="0" anchor="ctr"/>
           <a:lstStyle>
             <a:lvl1pPr algn="l">
               <a:defRPr sz="900">
@@ -2819,7 +2818,7 @@
           <a:p>
             <a:fld id="{241EB5C9-1307-BA42-ABA2-0BC069CD8E7F}" type="datetimeFigureOut">
               <a:rPr lang="en-US" smtClean="0"/>
-              <a:t>10/6/2026</a:t>
+              <a:t>10/27/2026</a:t>
             </a:fld>
             <a:endParaRPr lang="en-US"/>
           </a:p>
@@ -2832,7 +2831,7 @@
             <a:spLocks noGrp="1"/>
           </p:cNvSpPr>
           <p:nvPr>
-            <p:ph idx="3" sz="quarter" type="ftr"/>
+            <p:ph type="ftr" sz="quarter" idx="3"/>
           </p:nvPr>
         </p:nvSpPr>
         <p:spPr>
@@ -2845,7 +2844,7 @@
           </a:prstGeom>
         </p:spPr>
         <p:txBody>
-          <a:bodyPr anchor="ctr" bIns="45720" lIns="91440" rIns="91440" rtlCol="0" tIns="45720" vert="horz"/>
+          <a:bodyPr vert="horz" lIns="91440" tIns="45720" rIns="91440" bIns="45720" rtlCol="0" anchor="ctr"/>
           <a:lstStyle>
             <a:lvl1pPr algn="ctr">
               <a:defRPr sz="900">
@@ -2869,7 +2868,7 @@
             <a:spLocks noGrp="1"/>
           </p:cNvSpPr>
           <p:nvPr>
-            <p:ph idx="4" sz="quarter" type="sldNum"/>
+            <p:ph type="sldNum" sz="quarter" idx="4"/>
           </p:nvPr>
         </p:nvSpPr>
         <p:spPr>
@@ -2882,7 +2881,7 @@
           </a:prstGeom>
         </p:spPr>
         <p:txBody>
-          <a:bodyPr anchor="ctr" bIns="45720" lIns="91440" rIns="91440" rtlCol="0" tIns="45720" vert="horz"/>
+          <a:bodyPr vert="horz" lIns="91440" tIns="45720" rIns="91440" bIns="45720" rtlCol="0" anchor="ctr"/>
           <a:lstStyle>
             <a:lvl1pPr algn="r">
               <a:defRPr sz="900">
@@ -2905,7 +2904,7 @@
       </p:sp>
       <p:pic>
         <p:nvPicPr>
-          <p:cNvPr descr="/mnt/data/asset_icons/image3.png" id="7" name="Image 1">
+          <p:cNvPr id="7" name="Image 1" descr="/mnt/data/asset_icons/image3.png">
             <a:extLst>
               <a:ext uri="{FF2B5EF4-FFF2-40B4-BE49-F238E27FC236}">
                 <a16:creationId xmlns:a16="http://schemas.microsoft.com/office/drawing/2014/main" id="{07B1F67F-77AB-4D11-A16B-35A1040E62AB}"/>
@@ -2940,7 +2939,7 @@
       </p:ext>
     </p:extLst>
   </p:cSld>
-  <p:clrMap accent1="accent1" accent2="accent2" accent3="accent3" accent4="accent4" accent5="accent5" accent6="accent6" bg1="lt1" bg2="lt2" folHlink="folHlink" hlink="hlink" tx1="dk1" tx2="dk2"/>
+  <p:clrMap bg1="lt1" tx1="dk1" bg2="lt2" tx2="dk2" accent1="accent1" accent2="accent2" accent3="accent3" accent4="accent4" accent5="accent5" accent6="accent6" hlink="hlink" folHlink="folHlink"/>
   <p:sldLayoutIdLst>
     <p:sldLayoutId id="2147483649" r:id="rId1"/>
     <p:sldLayoutId id="2147483650" r:id="rId2"/>
@@ -2956,12 +2955,12 @@
   </p:sldLayoutIdLst>
   <p:txStyles>
     <p:titleStyle>
-      <a:lvl1pPr algn="ctr" defTabSz="342900" eaLnBrk="1" hangingPunct="1" latinLnBrk="0" rtl="0">
+      <a:lvl1pPr algn="ctr" defTabSz="342900" rtl="0" eaLnBrk="1" latinLnBrk="0" hangingPunct="1">
         <a:spcBef>
           <a:spcPct val="0"/>
         </a:spcBef>
         <a:buNone/>
-        <a:defRPr kern="1200" sz="2400">
+        <a:defRPr sz="2400" kern="1200">
           <a:solidFill>
             <a:schemeClr val="tx1"/>
           </a:solidFill>
@@ -2972,13 +2971,13 @@
       </a:lvl1pPr>
     </p:titleStyle>
     <p:bodyStyle>
-      <a:lvl1pPr algn="l" defTabSz="342900" eaLnBrk="1" hangingPunct="1" indent="-342900" latinLnBrk="0" marL="342900" rtl="0">
+      <a:lvl1pPr marL="342900" indent="-342900" algn="l" defTabSz="342900" rtl="0" eaLnBrk="1" latinLnBrk="0" hangingPunct="1">
         <a:spcBef>
           <a:spcPct val="20000"/>
         </a:spcBef>
         <a:buFont typeface="Arial"/>
         <a:buChar char="•"/>
-        <a:defRPr kern="1200" sz="2000">
+        <a:defRPr sz="2000" kern="1200">
           <a:solidFill>
             <a:schemeClr val="tx1"/>
           </a:solidFill>
@@ -2987,13 +2986,13 @@
           <a:cs typeface="+mn-cs"/>
         </a:defRPr>
       </a:lvl1pPr>
-      <a:lvl2pPr algn="l" defTabSz="342900" eaLnBrk="1" hangingPunct="1" indent="-342900" latinLnBrk="0" marL="685800" rtl="0">
+      <a:lvl2pPr marL="685800" indent="-342900" algn="l" defTabSz="342900" rtl="0" eaLnBrk="1" latinLnBrk="0" hangingPunct="1">
         <a:spcBef>
           <a:spcPct val="20000"/>
         </a:spcBef>
         <a:buFont typeface="Arial"/>
         <a:buChar char="–"/>
-        <a:defRPr kern="1200" sz="2000">
+        <a:defRPr sz="2000" kern="1200">
           <a:solidFill>
             <a:schemeClr val="tx1"/>
           </a:solidFill>
@@ -3002,13 +3001,13 @@
           <a:cs typeface="+mn-cs"/>
         </a:defRPr>
       </a:lvl2pPr>
-      <a:lvl3pPr algn="l" defTabSz="342900" eaLnBrk="1" hangingPunct="1" indent="-342900" latinLnBrk="0" marL="1028700" rtl="0">
+      <a:lvl3pPr marL="1028700" indent="-342900" algn="l" defTabSz="342900" rtl="0" eaLnBrk="1" latinLnBrk="0" hangingPunct="1">
         <a:spcBef>
           <a:spcPct val="20000"/>
         </a:spcBef>
         <a:buFont typeface="Arial"/>
         <a:buChar char="•"/>
-        <a:defRPr kern="1200" sz="1600">
+        <a:defRPr sz="1600" kern="1200">
           <a:solidFill>
             <a:schemeClr val="tx1"/>
           </a:solidFill>
@@ -3017,13 +3016,13 @@
           <a:cs typeface="+mn-cs"/>
         </a:defRPr>
       </a:lvl3pPr>
-      <a:lvl4pPr algn="l" defTabSz="342900" eaLnBrk="1" hangingPunct="1" indent="-342900" latinLnBrk="0" marL="1371600" rtl="0">
+      <a:lvl4pPr marL="1371600" indent="-342900" algn="l" defTabSz="342900" rtl="0" eaLnBrk="1" latinLnBrk="0" hangingPunct="1">
         <a:spcBef>
           <a:spcPct val="20000"/>
         </a:spcBef>
         <a:buFont typeface="Arial"/>
         <a:buChar char="–"/>
-        <a:defRPr kern="1200" sz="1400">
+        <a:defRPr sz="1400" kern="1200">
           <a:solidFill>
             <a:schemeClr val="tx1"/>
           </a:solidFill>
@@ -3032,13 +3031,13 @@
           <a:cs typeface="+mn-cs"/>
         </a:defRPr>
       </a:lvl4pPr>
-      <a:lvl5pPr algn="l" defTabSz="342900" eaLnBrk="1" hangingPunct="1" indent="-342900" latinLnBrk="0" marL="1714500" rtl="0">
+      <a:lvl5pPr marL="1714500" indent="-342900" algn="l" defTabSz="342900" rtl="0" eaLnBrk="1" latinLnBrk="0" hangingPunct="1">
         <a:spcBef>
           <a:spcPct val="20000"/>
         </a:spcBef>
         <a:buFont typeface="Arial"/>
         <a:buChar char="»"/>
-        <a:defRPr kern="1200" sz="1400">
+        <a:defRPr sz="1400" kern="1200">
           <a:solidFill>
             <a:schemeClr val="tx1"/>
           </a:solidFill>
@@ -3047,13 +3046,13 @@
           <a:cs typeface="+mn-cs"/>
         </a:defRPr>
       </a:lvl5pPr>
-      <a:lvl6pPr algn="l" defTabSz="342900" eaLnBrk="1" hangingPunct="1" indent="-342900" latinLnBrk="0" marL="2057400" rtl="0">
+      <a:lvl6pPr marL="2057400" indent="-342900" algn="l" defTabSz="342900" rtl="0" eaLnBrk="1" latinLnBrk="0" hangingPunct="1">
         <a:spcBef>
           <a:spcPct val="20000"/>
         </a:spcBef>
         <a:buFont typeface="Arial"/>
         <a:buChar char="•"/>
-        <a:defRPr kern="1200" sz="1500">
+        <a:defRPr sz="1500" kern="1200">
           <a:solidFill>
             <a:schemeClr val="tx1"/>
           </a:solidFill>
@@ -3062,13 +3061,13 @@
           <a:cs typeface="+mn-cs"/>
         </a:defRPr>
       </a:lvl6pPr>
-      <a:lvl7pPr algn="l" defTabSz="342900" eaLnBrk="1" hangingPunct="1" indent="-342900" latinLnBrk="0" marL="2400300" rtl="0">
+      <a:lvl7pPr marL="2400300" indent="-342900" algn="l" defTabSz="342900" rtl="0" eaLnBrk="1" latinLnBrk="0" hangingPunct="1">
         <a:spcBef>
           <a:spcPct val="20000"/>
         </a:spcBef>
         <a:buFont typeface="Arial"/>
         <a:buChar char="•"/>
-        <a:defRPr kern="1200" sz="1500">
+        <a:defRPr sz="1500" kern="1200">
           <a:solidFill>
             <a:schemeClr val="tx1"/>
           </a:solidFill>
@@ -3077,13 +3076,13 @@
           <a:cs typeface="+mn-cs"/>
         </a:defRPr>
       </a:lvl7pPr>
-      <a:lvl8pPr algn="l" defTabSz="342900" eaLnBrk="1" hangingPunct="1" indent="-342900" latinLnBrk="0" marL="2743200" rtl="0">
+      <a:lvl8pPr marL="2743200" indent="-342900" algn="l" defTabSz="342900" rtl="0" eaLnBrk="1" latinLnBrk="0" hangingPunct="1">
         <a:spcBef>
           <a:spcPct val="20000"/>
         </a:spcBef>
         <a:buFont typeface="Arial"/>
         <a:buChar char="•"/>
-        <a:defRPr kern="1200" sz="1500">
+        <a:defRPr sz="1500" kern="1200">
           <a:solidFill>
             <a:schemeClr val="tx1"/>
           </a:solidFill>
@@ -3092,13 +3091,13 @@
           <a:cs typeface="+mn-cs"/>
         </a:defRPr>
       </a:lvl8pPr>
-      <a:lvl9pPr algn="l" defTabSz="342900" eaLnBrk="1" hangingPunct="1" indent="-342900" latinLnBrk="0" marL="3086100" rtl="0">
+      <a:lvl9pPr marL="3086100" indent="-342900" algn="l" defTabSz="342900" rtl="0" eaLnBrk="1" latinLnBrk="0" hangingPunct="1">
         <a:spcBef>
           <a:spcPct val="20000"/>
         </a:spcBef>
         <a:buFont typeface="Arial"/>
         <a:buChar char="•"/>
-        <a:defRPr kern="1200" sz="1500">
+        <a:defRPr sz="1500" kern="1200">
           <a:solidFill>
             <a:schemeClr val="tx1"/>
           </a:solidFill>
@@ -3112,8 +3111,8 @@
       <a:defPPr>
         <a:defRPr lang="en-US"/>
       </a:defPPr>
-      <a:lvl1pPr algn="l" defTabSz="342900" eaLnBrk="1" hangingPunct="1" latinLnBrk="0" marL="0" rtl="0">
-        <a:defRPr kern="1200" sz="1350">
+      <a:lvl1pPr marL="0" algn="l" defTabSz="342900" rtl="0" eaLnBrk="1" latinLnBrk="0" hangingPunct="1">
+        <a:defRPr sz="1350" kern="1200">
           <a:solidFill>
             <a:schemeClr val="tx1"/>
           </a:solidFill>
@@ -3122,8 +3121,8 @@
           <a:cs typeface="+mn-cs"/>
         </a:defRPr>
       </a:lvl1pPr>
-      <a:lvl2pPr algn="l" defTabSz="342900" eaLnBrk="1" hangingPunct="1" latinLnBrk="0" marL="342900" rtl="0">
-        <a:defRPr kern="1200" sz="1350">
+      <a:lvl2pPr marL="342900" algn="l" defTabSz="342900" rtl="0" eaLnBrk="1" latinLnBrk="0" hangingPunct="1">
+        <a:defRPr sz="1350" kern="1200">
           <a:solidFill>
             <a:schemeClr val="tx1"/>
           </a:solidFill>
@@ -3132,8 +3131,8 @@
           <a:cs typeface="+mn-cs"/>
         </a:defRPr>
       </a:lvl2pPr>
-      <a:lvl3pPr algn="l" defTabSz="342900" eaLnBrk="1" hangingPunct="1" latinLnBrk="0" marL="685800" rtl="0">
-        <a:defRPr kern="1200" sz="1350">
+      <a:lvl3pPr marL="685800" algn="l" defTabSz="342900" rtl="0" eaLnBrk="1" latinLnBrk="0" hangingPunct="1">
+        <a:defRPr sz="1350" kern="1200">
           <a:solidFill>
             <a:schemeClr val="tx1"/>
           </a:solidFill>
@@ -3142,8 +3141,8 @@
           <a:cs typeface="+mn-cs"/>
         </a:defRPr>
       </a:lvl3pPr>
-      <a:lvl4pPr algn="l" defTabSz="342900" eaLnBrk="1" hangingPunct="1" latinLnBrk="0" marL="1028700" rtl="0">
-        <a:defRPr kern="1200" sz="1350">
+      <a:lvl4pPr marL="1028700" algn="l" defTabSz="342900" rtl="0" eaLnBrk="1" latinLnBrk="0" hangingPunct="1">
+        <a:defRPr sz="1350" kern="1200">
           <a:solidFill>
             <a:schemeClr val="tx1"/>
           </a:solidFill>
@@ -3152,8 +3151,8 @@
           <a:cs typeface="+mn-cs"/>
         </a:defRPr>
       </a:lvl4pPr>
-      <a:lvl5pPr algn="l" defTabSz="342900" eaLnBrk="1" hangingPunct="1" latinLnBrk="0" marL="1371600" rtl="0">
-        <a:defRPr kern="1200" sz="1350">
+      <a:lvl5pPr marL="1371600" algn="l" defTabSz="342900" rtl="0" eaLnBrk="1" latinLnBrk="0" hangingPunct="1">
+        <a:defRPr sz="1350" kern="1200">
           <a:solidFill>
             <a:schemeClr val="tx1"/>
           </a:solidFill>
@@ -3162,8 +3161,8 @@
           <a:cs typeface="+mn-cs"/>
         </a:defRPr>
       </a:lvl5pPr>
-      <a:lvl6pPr algn="l" defTabSz="342900" eaLnBrk="1" hangingPunct="1" latinLnBrk="0" marL="1714500" rtl="0">
-        <a:defRPr kern="1200" sz="1350">
+      <a:lvl6pPr marL="1714500" algn="l" defTabSz="342900" rtl="0" eaLnBrk="1" latinLnBrk="0" hangingPunct="1">
+        <a:defRPr sz="1350" kern="1200">
           <a:solidFill>
             <a:schemeClr val="tx1"/>
           </a:solidFill>
@@ -3172,8 +3171,8 @@
           <a:cs typeface="+mn-cs"/>
         </a:defRPr>
       </a:lvl6pPr>
-      <a:lvl7pPr algn="l" defTabSz="342900" eaLnBrk="1" hangingPunct="1" latinLnBrk="0" marL="2057400" rtl="0">
-        <a:defRPr kern="1200" sz="1350">
+      <a:lvl7pPr marL="2057400" algn="l" defTabSz="342900" rtl="0" eaLnBrk="1" latinLnBrk="0" hangingPunct="1">
+        <a:defRPr sz="1350" kern="1200">
           <a:solidFill>
             <a:schemeClr val="tx1"/>
           </a:solidFill>
@@ -3182,8 +3181,8 @@
           <a:cs typeface="+mn-cs"/>
         </a:defRPr>
       </a:lvl7pPr>
-      <a:lvl8pPr algn="l" defTabSz="342900" eaLnBrk="1" hangingPunct="1" latinLnBrk="0" marL="2400300" rtl="0">
-        <a:defRPr kern="1200" sz="1350">
+      <a:lvl8pPr marL="2400300" algn="l" defTabSz="342900" rtl="0" eaLnBrk="1" latinLnBrk="0" hangingPunct="1">
+        <a:defRPr sz="1350" kern="1200">
           <a:solidFill>
             <a:schemeClr val="tx1"/>
           </a:solidFill>
@@ -3192,8 +3191,8 @@
           <a:cs typeface="+mn-cs"/>
         </a:defRPr>
       </a:lvl8pPr>
-      <a:lvl9pPr algn="l" defTabSz="342900" eaLnBrk="1" hangingPunct="1" latinLnBrk="0" marL="2743200" rtl="0">
-        <a:defRPr kern="1200" sz="1350">
+      <a:lvl9pPr marL="2743200" algn="l" defTabSz="342900" rtl="0" eaLnBrk="1" latinLnBrk="0" hangingPunct="1">
+        <a:defRPr sz="1350" kern="1200">
           <a:solidFill>
             <a:schemeClr val="tx1"/>
           </a:solidFill>
@@ -3231,7 +3230,7 @@
             <a:spLocks noGrp="1"/>
           </p:cNvSpPr>
           <p:nvPr>
-            <p:ph type="title"/>
+            <p:ph type="ctrTitle"/>
           </p:nvPr>
         </p:nvSpPr>
         <p:spPr/>
@@ -3239,12 +3238,12 @@
           <a:bodyPr/>
           <a:lstStyle/>
           <a:p>
-            <a:pPr lvl="0" indent="0" marL="0">
+            <a:pPr marL="0" lvl="0" indent="0">
               <a:buNone/>
             </a:pPr>
             <a:r>
-              <a:rPr/>
-              <a:t>Титул</a:t>
+              <a:rPr lang="ru-RU" dirty="0"/>
+              <a:t>Лекция 4. Отраслевые условия, контроль и доказательства соответствия</a:t>
             </a:r>
           </a:p>
         </p:txBody>
@@ -3256,38 +3255,26 @@
             <a:spLocks noGrp="1"/>
           </p:cNvSpPr>
           <p:nvPr>
-            <p:ph idx="1"/>
+            <p:ph type="subTitle" idx="1"/>
           </p:nvPr>
         </p:nvSpPr>
         <p:spPr/>
         <p:txBody>
-          <a:bodyPr/>
+          <a:bodyPr>
+            <a:normAutofit/>
+          </a:bodyPr>
           <a:lstStyle/>
           <a:p>
-            <a:pPr lvl="0" indent="0" marL="0">
-              <a:buNone/>
-            </a:pPr>
-            <a:r>
-              <a:rPr b="1"/>
-              <a:t>Нормативно-правовое обеспечение критической информационной инфраструктуры</a:t>
-            </a:r>
-          </a:p>
-          <a:p>
-            <a:pPr lvl="0" indent="0" marL="0">
-              <a:spcBef>
-                <a:spcPts val="3000"/>
-              </a:spcBef>
-              <a:buNone/>
-            </a:pPr>
-            <a:r>
-              <a:rPr b="1"/>
-              <a:t>Лекция 4. Отраслевые условия, контроль и доказательства соответствия</a:t>
-            </a:r>
+            <a:pPr lvl="0"/>
+            <a:endParaRPr b="1" dirty="0"/>
           </a:p>
         </p:txBody>
       </p:sp>
     </p:spTree>
   </p:cSld>
+  <p:clrMapOvr>
+    <a:masterClrMapping/>
+  </p:clrMapOvr>
 </p:sld>
 </file>
 
@@ -3323,11 +3310,10 @@
           <a:bodyPr/>
           <a:lstStyle/>
           <a:p>
-            <a:pPr lvl="0" indent="0" marL="0">
+            <a:pPr marL="0" lvl="0" indent="0">
               <a:buNone/>
             </a:pPr>
             <a:r>
-              <a:rPr/>
               <a:t>Практика</a:t>
             </a:r>
           </a:p>
@@ -3348,55 +3334,210 @@
           <a:bodyPr/>
           <a:lstStyle/>
           <a:p>
-            <a:pPr lvl="0" indent="0" marL="0">
+            <a:pPr marL="0" lvl="0" indent="0">
               <a:buNone/>
             </a:pPr>
             <a:r>
-              <a:rPr/>
-              <a:t>ПЗ-3 формирует третий артефакт досье — реестр соответствия и пробелов.</a:t>
-            </a:r>
-          </a:p>
-          <a:p>
-            <a:pPr lvl="0" indent="0" marL="0">
+              <a:rPr dirty="0"/>
+              <a:t>ПЗ-3 </a:t>
+            </a:r>
+            <a:r>
+              <a:rPr dirty="0" err="1"/>
+              <a:t>формирует</a:t>
+            </a:r>
+            <a:r>
+              <a:rPr dirty="0"/>
+              <a:t> </a:t>
+            </a:r>
+            <a:r>
+              <a:rPr dirty="0" err="1"/>
+              <a:t>третий</a:t>
+            </a:r>
+            <a:r>
+              <a:rPr dirty="0"/>
+              <a:t> </a:t>
+            </a:r>
+            <a:r>
+              <a:rPr dirty="0" err="1"/>
+              <a:t>артефакт</a:t>
+            </a:r>
+            <a:r>
+              <a:rPr dirty="0"/>
+              <a:t> </a:t>
+            </a:r>
+            <a:r>
+              <a:rPr dirty="0" err="1"/>
+              <a:t>досье</a:t>
+            </a:r>
+            <a:r>
+              <a:rPr dirty="0"/>
+              <a:t> — </a:t>
+            </a:r>
+            <a:r>
+              <a:rPr dirty="0" err="1"/>
+              <a:t>реестр</a:t>
+            </a:r>
+            <a:r>
+              <a:rPr dirty="0"/>
+              <a:t> </a:t>
+            </a:r>
+            <a:r>
+              <a:rPr dirty="0" err="1"/>
+              <a:t>соответствия</a:t>
+            </a:r>
+            <a:r>
+              <a:rPr dirty="0"/>
+              <a:t> и </a:t>
+            </a:r>
+            <a:r>
+              <a:rPr dirty="0" err="1"/>
+              <a:t>пробелов</a:t>
+            </a:r>
+            <a:r>
+              <a:rPr dirty="0"/>
+              <a:t>.</a:t>
+            </a:r>
+          </a:p>
+          <a:p>
+            <a:pPr marL="0" lvl="0" indent="0">
               <a:buNone/>
             </a:pPr>
             <a:r>
-              <a:rPr/>
-              <a:t>Студент связывает:</a:t>
+              <a:rPr dirty="0" err="1"/>
+              <a:t>Связывае</a:t>
+            </a:r>
+            <a:r>
+              <a:rPr lang="ru-RU" dirty="0"/>
+              <a:t>м</a:t>
+            </a:r>
+            <a:r>
+              <a:rPr dirty="0"/>
+              <a:t>:</a:t>
             </a:r>
           </a:p>
           <a:p>
             <a:pPr lvl="0"/>
             <a:r>
-              <a:rPr/>
-              <a:t>паспорт применимости;</a:t>
+              <a:rPr dirty="0" err="1"/>
+              <a:t>паспорт</a:t>
+            </a:r>
+            <a:r>
+              <a:rPr dirty="0"/>
+              <a:t> </a:t>
+            </a:r>
+            <a:r>
+              <a:rPr dirty="0" err="1"/>
+              <a:t>применимости</a:t>
+            </a:r>
+            <a:r>
+              <a:rPr dirty="0"/>
+              <a:t>;</a:t>
             </a:r>
           </a:p>
           <a:p>
             <a:pPr lvl="0"/>
             <a:r>
-              <a:rPr/>
-              <a:t>карточку категорирования;</a:t>
+              <a:rPr dirty="0" err="1"/>
+              <a:t>карточку</a:t>
+            </a:r>
+            <a:r>
+              <a:rPr dirty="0"/>
+              <a:t> </a:t>
+            </a:r>
+            <a:r>
+              <a:rPr dirty="0" err="1"/>
+              <a:t>категорирования</a:t>
+            </a:r>
+            <a:r>
+              <a:rPr dirty="0"/>
+              <a:t>;</a:t>
             </a:r>
           </a:p>
           <a:p>
             <a:pPr lvl="0"/>
             <a:r>
-              <a:rPr/>
-              <a:t>отраслевые условия, если подтверждена их применимость;</a:t>
+              <a:rPr dirty="0" err="1"/>
+              <a:t>отраслевые</a:t>
+            </a:r>
+            <a:r>
+              <a:rPr dirty="0"/>
+              <a:t> </a:t>
+            </a:r>
+            <a:r>
+              <a:rPr dirty="0" err="1"/>
+              <a:t>условия</a:t>
+            </a:r>
+            <a:r>
+              <a:rPr dirty="0"/>
+              <a:t>, </a:t>
+            </a:r>
+            <a:r>
+              <a:rPr dirty="0" err="1"/>
+              <a:t>если</a:t>
+            </a:r>
+            <a:r>
+              <a:rPr dirty="0"/>
+              <a:t> </a:t>
+            </a:r>
+            <a:r>
+              <a:rPr dirty="0" err="1"/>
+              <a:t>подтверждена</a:t>
+            </a:r>
+            <a:r>
+              <a:rPr dirty="0"/>
+              <a:t> </a:t>
+            </a:r>
+            <a:r>
+              <a:rPr dirty="0" err="1"/>
+              <a:t>их</a:t>
+            </a:r>
+            <a:r>
+              <a:rPr dirty="0"/>
+              <a:t> </a:t>
+            </a:r>
+            <a:r>
+              <a:rPr dirty="0" err="1"/>
+              <a:t>применимость</a:t>
+            </a:r>
+            <a:r>
+              <a:rPr dirty="0"/>
+              <a:t>;</a:t>
             </a:r>
           </a:p>
           <a:p>
             <a:pPr lvl="0"/>
             <a:r>
-              <a:rPr/>
-              <a:t>доказательства и незакрытые задачи.</a:t>
+              <a:rPr dirty="0" err="1"/>
+              <a:t>доказательства</a:t>
+            </a:r>
+            <a:r>
+              <a:rPr dirty="0"/>
+              <a:t> и </a:t>
+            </a:r>
+            <a:r>
+              <a:rPr dirty="0" err="1"/>
+              <a:t>незакрытые</a:t>
+            </a:r>
+            <a:r>
+              <a:rPr dirty="0"/>
+              <a:t> </a:t>
+            </a:r>
+            <a:r>
+              <a:rPr dirty="0" err="1"/>
+              <a:t>задачи</a:t>
+            </a:r>
+            <a:r>
+              <a:rPr dirty="0"/>
+              <a:t>.</a:t>
             </a:r>
           </a:p>
         </p:txBody>
       </p:sp>
     </p:spTree>
   </p:cSld>
+  <p:clrMapOvr>
+    <a:masterClrMapping/>
+  </p:clrMapOvr>
 </p:sld>
 </file>
 
@@ -3432,13 +3573,14 @@
           <a:bodyPr/>
           <a:lstStyle/>
           <a:p>
-            <a:pPr lvl="0" indent="0" marL="0">
+            <a:pPr marL="0" lvl="0" indent="0">
               <a:buNone/>
             </a:pPr>
             <a:r>
-              <a:rPr/>
-              <a:t>Связь с курсом</a:t>
-            </a:r>
+              <a:rPr lang="ru-RU" dirty="0"/>
+              <a:t>Вопросы самопроверки</a:t>
+            </a:r>
+            <a:endParaRPr dirty="0"/>
           </a:p>
         </p:txBody>
       </p:sp>
@@ -3454,137 +3596,92 @@
         </p:nvSpPr>
         <p:spPr/>
         <p:txBody>
-          <a:bodyPr/>
+          <a:bodyPr>
+            <a:normAutofit fontScale="85000" lnSpcReduction="10000"/>
+          </a:bodyPr>
           <a:lstStyle/>
           <a:p>
-            <a:pPr lvl="0"/>
-            <a:r>
-              <a:rPr/>
-              <a:t>Лекция 2: устанавливает применимость и границы.</a:t>
-            </a:r>
-          </a:p>
-          <a:p>
-            <a:pPr lvl="0"/>
-            <a:r>
-              <a:rPr/>
-              <a:t>Лекция 3: фиксирует решение о категорировании.</a:t>
-            </a:r>
-          </a:p>
-          <a:p>
-            <a:pPr lvl="0"/>
-            <a:r>
-              <a:rPr/>
-              <a:t>Лекция 4: добавляет применимые условия и контроль доказательств.</a:t>
-            </a:r>
-          </a:p>
-          <a:p>
-            <a:pPr lvl="0"/>
-            <a:r>
-              <a:rPr/>
-              <a:t>Лекции 5–11: закрывают пробелы организационными и техническими мерами.</a:t>
-            </a:r>
-          </a:p>
-          <a:p>
-            <a:pPr lvl="0"/>
-            <a:r>
-              <a:rPr/>
-              <a:t>Лекция 16: объединяет артефакты в итоговое досье.</a:t>
-            </a:r>
+            <a:pPr marL="0" lvl="0" indent="0">
+              <a:buNone/>
+            </a:pPr>
+            <a:r>
+              <a:rPr lang="ru-RU" dirty="0"/>
+              <a:t>1. Почему нельзя применять отраслевое условие только на основании названия компании или системы?</a:t>
+            </a:r>
+          </a:p>
+          <a:p>
+            <a:pPr marL="0" lvl="0" indent="0">
+              <a:buNone/>
+            </a:pPr>
+            <a:endParaRPr lang="ru-RU" dirty="0"/>
+          </a:p>
+          <a:p>
+            <a:pPr marL="0" lvl="0" indent="0">
+              <a:buNone/>
+            </a:pPr>
+            <a:r>
+              <a:rPr lang="ru-RU" dirty="0"/>
+              <a:t>2. Перечислите поля карты применимости отраслевого условия. Какое поле не позволяет подменить анализ предположением?</a:t>
+            </a:r>
+          </a:p>
+          <a:p>
+            <a:pPr marL="0" lvl="0" indent="0">
+              <a:buNone/>
+            </a:pPr>
+            <a:endParaRPr lang="ru-RU" dirty="0"/>
+          </a:p>
+          <a:p>
+            <a:pPr marL="0" lvl="0" indent="0">
+              <a:buNone/>
+            </a:pPr>
+            <a:r>
+              <a:rPr lang="ru-RU" dirty="0"/>
+              <a:t>3. Чем внутренняя проверка доказательств отличается от государственного контроля?</a:t>
+            </a:r>
+          </a:p>
+          <a:p>
+            <a:pPr marL="0" lvl="0" indent="0">
+              <a:buNone/>
+            </a:pPr>
+            <a:endParaRPr lang="ru-RU" dirty="0"/>
+          </a:p>
+          <a:p>
+            <a:pPr marL="0" lvl="0" indent="0">
+              <a:buNone/>
+            </a:pPr>
+            <a:r>
+              <a:rPr lang="ru-RU" dirty="0"/>
+              <a:t>4. Почему отсутствие одного документа ещё не доказывает нарушение, но требует управленческого действия?</a:t>
+            </a:r>
+          </a:p>
+          <a:p>
+            <a:pPr marL="0" lvl="0" indent="0">
+              <a:buNone/>
+            </a:pPr>
+            <a:endParaRPr lang="ru-RU" dirty="0"/>
+          </a:p>
+          <a:p>
+            <a:pPr marL="0" lvl="0" indent="0">
+              <a:buNone/>
+            </a:pPr>
+            <a:r>
+              <a:rPr lang="ru-RU" dirty="0"/>
+              <a:t>5. Чем реестр соответствия и пробелов отличается от декларации соответствия?</a:t>
+            </a:r>
+            <a:endParaRPr dirty="0"/>
           </a:p>
         </p:txBody>
       </p:sp>
     </p:spTree>
+    <p:extLst>
+      <p:ext uri="{BB962C8B-B14F-4D97-AF65-F5344CB8AC3E}">
+        <p14:creationId xmlns:p14="http://schemas.microsoft.com/office/powerpoint/2010/main" val="66681729"/>
+      </p:ext>
+    </p:extLst>
   </p:cSld>
-</p:sld>
-</file>
-
-<file path=ppt/slides/slide12.xml><?xml version="1.0" encoding="utf-8"?>
-<p:sld xmlns:a="http://schemas.openxmlformats.org/drawingml/2006/main" xmlns:r="http://schemas.openxmlformats.org/officeDocument/2006/relationships" xmlns:p="http://schemas.openxmlformats.org/presentationml/2006/main">
-  <p:cSld>
-    <p:spTree>
-      <p:nvGrpSpPr>
-        <p:cNvPr id="1" name=""/>
-        <p:cNvGrpSpPr/>
-        <p:nvPr/>
-      </p:nvGrpSpPr>
-      <p:grpSpPr>
-        <a:xfrm>
-          <a:off x="0" y="0"/>
-          <a:ext cx="0" cy="0"/>
-          <a:chOff x="0" y="0"/>
-          <a:chExt cx="0" cy="0"/>
-        </a:xfrm>
-      </p:grpSpPr>
-      <p:sp>
-        <p:nvSpPr>
-          <p:cNvPr id="2" name="Title 1"/>
-          <p:cNvSpPr>
-            <a:spLocks noGrp="1"/>
-          </p:cNvSpPr>
-          <p:nvPr>
-            <p:ph type="title"/>
-          </p:nvPr>
-        </p:nvSpPr>
-        <p:spPr/>
-        <p:txBody>
-          <a:bodyPr/>
-          <a:lstStyle/>
-          <a:p>
-            <a:pPr lvl="0" indent="0" marL="0">
-              <a:buNone/>
-            </a:pPr>
-            <a:r>
-              <a:rPr/>
-              <a:t>Итог</a:t>
-            </a:r>
-          </a:p>
-        </p:txBody>
-      </p:sp>
-      <p:sp>
-        <p:nvSpPr>
-          <p:cNvPr id="3" name="Content Placeholder 2"/>
-          <p:cNvSpPr>
-            <a:spLocks noGrp="1"/>
-          </p:cNvSpPr>
-          <p:nvPr>
-            <p:ph idx="1"/>
-          </p:nvPr>
-        </p:nvSpPr>
-        <p:spPr/>
-        <p:txBody>
-          <a:bodyPr/>
-          <a:lstStyle/>
-          <a:p>
-            <a:pPr lvl="0" indent="0" marL="0">
-              <a:buNone/>
-            </a:pPr>
-            <a:r>
-              <a:rPr b="1"/>
-              <a:t>Формула модуля</a:t>
-            </a:r>
-          </a:p>
-          <a:p>
-            <a:pPr lvl="0" indent="0" marL="0">
-              <a:buNone/>
-            </a:pPr>
-            <a:r>
-              <a:rPr b="1"/>
-              <a:t>условие → применимость → доказательство → статус → действие → пересмотр</a:t>
-            </a:r>
-          </a:p>
-          <a:p>
-            <a:pPr lvl="0" indent="0" marL="0">
-              <a:buNone/>
-            </a:pPr>
-            <a:r>
-              <a:rPr/>
-              <a:t>Соответствие можно поддерживать, только если каждое требование связано с объектом, доказательством и ответственным действием.</a:t>
-            </a:r>
-          </a:p>
-        </p:txBody>
-      </p:sp>
-    </p:spTree>
-  </p:cSld>
+  <p:clrMapOvr>
+    <a:masterClrMapping/>
+  </p:clrMapOvr>
 </p:sld>
 </file>
 
@@ -3620,13 +3717,22 @@
           <a:bodyPr/>
           <a:lstStyle/>
           <a:p>
-            <a:pPr lvl="0" indent="0" marL="0">
+            <a:pPr marL="0" lvl="0" indent="0">
               <a:buNone/>
             </a:pPr>
             <a:r>
-              <a:rPr/>
-              <a:t>Вопрос модуля</a:t>
-            </a:r>
+              <a:rPr dirty="0" err="1"/>
+              <a:t>Вопрос</a:t>
+            </a:r>
+            <a:r>
+              <a:rPr dirty="0"/>
+              <a:t> </a:t>
+            </a:r>
+            <a:r>
+              <a:rPr lang="ru-RU" dirty="0"/>
+              <a:t>лекции</a:t>
+            </a:r>
+            <a:endParaRPr dirty="0"/>
           </a:p>
         </p:txBody>
       </p:sp>
@@ -3645,62 +3751,296 @@
           <a:bodyPr/>
           <a:lstStyle/>
           <a:p>
-            <a:pPr lvl="0" indent="0" marL="0">
+            <a:pPr marL="0" lvl="0" indent="0">
               <a:buNone/>
             </a:pPr>
             <a:r>
-              <a:rPr b="1"/>
-              <a:t>Какие дополнительные условия применимы к нашему решению?</a:t>
-            </a:r>
-          </a:p>
-          <a:p>
-            <a:pPr lvl="0" indent="0" marL="0">
-              <a:buNone/>
-            </a:pPr>
-            <a:r>
-              <a:rPr/>
-              <a:t>После карточки категорирования нужно установить:</a:t>
+              <a:rPr b="1" dirty="0" err="1"/>
+              <a:t>Какие</a:t>
+            </a:r>
+            <a:r>
+              <a:rPr b="1" dirty="0"/>
+              <a:t> </a:t>
+            </a:r>
+            <a:r>
+              <a:rPr b="1" dirty="0" err="1"/>
+              <a:t>дополнительные</a:t>
+            </a:r>
+            <a:r>
+              <a:rPr b="1" dirty="0"/>
+              <a:t> </a:t>
+            </a:r>
+            <a:r>
+              <a:rPr b="1" dirty="0" err="1"/>
+              <a:t>условия</a:t>
+            </a:r>
+            <a:r>
+              <a:rPr b="1" dirty="0"/>
+              <a:t> </a:t>
+            </a:r>
+            <a:r>
+              <a:rPr b="1" dirty="0" err="1"/>
+              <a:t>применимы</a:t>
+            </a:r>
+            <a:r>
+              <a:rPr b="1" dirty="0"/>
+              <a:t> к </a:t>
+            </a:r>
+            <a:r>
+              <a:rPr b="1" dirty="0" err="1"/>
+              <a:t>нашему</a:t>
+            </a:r>
+            <a:r>
+              <a:rPr b="1" dirty="0"/>
+              <a:t> </a:t>
+            </a:r>
+            <a:r>
+              <a:rPr b="1" dirty="0" err="1"/>
+              <a:t>решению</a:t>
+            </a:r>
+            <a:r>
+              <a:rPr b="1" dirty="0"/>
+              <a:t>?</a:t>
             </a:r>
           </a:p>
           <a:p>
             <a:pPr lvl="0"/>
             <a:r>
-              <a:rPr/>
-              <a:t>применяются ли отраслевые особенности;</a:t>
+              <a:rPr dirty="0" err="1"/>
+              <a:t>применяются</a:t>
+            </a:r>
+            <a:r>
+              <a:rPr dirty="0"/>
+              <a:t> </a:t>
+            </a:r>
+            <a:r>
+              <a:rPr dirty="0" err="1"/>
+              <a:t>ли</a:t>
+            </a:r>
+            <a:r>
+              <a:rPr dirty="0"/>
+              <a:t> </a:t>
+            </a:r>
+            <a:r>
+              <a:rPr dirty="0" err="1"/>
+              <a:t>отраслевые</a:t>
+            </a:r>
+            <a:r>
+              <a:rPr dirty="0"/>
+              <a:t> </a:t>
+            </a:r>
+            <a:r>
+              <a:rPr dirty="0" err="1"/>
+              <a:t>особенности</a:t>
+            </a:r>
+            <a:r>
+              <a:rPr dirty="0"/>
+              <a:t>;</a:t>
             </a:r>
           </a:p>
           <a:p>
             <a:pPr lvl="0"/>
             <a:r>
-              <a:rPr/>
-              <a:t>какие дополнительные обязанности они создают;</a:t>
+              <a:rPr dirty="0" err="1"/>
+              <a:t>какие</a:t>
+            </a:r>
+            <a:r>
+              <a:rPr dirty="0"/>
+              <a:t> </a:t>
+            </a:r>
+            <a:r>
+              <a:rPr dirty="0" err="1"/>
+              <a:t>дополнительные</a:t>
+            </a:r>
+            <a:r>
+              <a:rPr dirty="0"/>
+              <a:t> </a:t>
+            </a:r>
+            <a:r>
+              <a:rPr dirty="0" err="1"/>
+              <a:t>обязанности</a:t>
+            </a:r>
+            <a:r>
+              <a:rPr dirty="0"/>
+              <a:t> </a:t>
+            </a:r>
+            <a:r>
+              <a:rPr dirty="0" err="1"/>
+              <a:t>они</a:t>
+            </a:r>
+            <a:r>
+              <a:rPr dirty="0"/>
+              <a:t> </a:t>
+            </a:r>
+            <a:r>
+              <a:rPr dirty="0" err="1"/>
+              <a:t>создают</a:t>
+            </a:r>
+            <a:r>
+              <a:rPr dirty="0"/>
+              <a:t>;</a:t>
             </a:r>
           </a:p>
           <a:p>
             <a:pPr lvl="0"/>
             <a:r>
-              <a:rPr/>
-              <a:t>чем подтверждено выполнение каждого требования;</a:t>
+              <a:rPr dirty="0" err="1"/>
+              <a:t>чем</a:t>
+            </a:r>
+            <a:r>
+              <a:rPr dirty="0"/>
+              <a:t> </a:t>
+            </a:r>
+            <a:r>
+              <a:rPr dirty="0" err="1"/>
+              <a:t>подтверждено</a:t>
+            </a:r>
+            <a:r>
+              <a:rPr dirty="0"/>
+              <a:t> </a:t>
+            </a:r>
+            <a:r>
+              <a:rPr dirty="0" err="1"/>
+              <a:t>выполнение</a:t>
+            </a:r>
+            <a:r>
+              <a:rPr dirty="0"/>
+              <a:t> </a:t>
+            </a:r>
+            <a:r>
+              <a:rPr dirty="0" err="1"/>
+              <a:t>каждого</a:t>
+            </a:r>
+            <a:r>
+              <a:rPr dirty="0"/>
+              <a:t> </a:t>
+            </a:r>
+            <a:r>
+              <a:rPr dirty="0" err="1"/>
+              <a:t>требования</a:t>
+            </a:r>
+            <a:r>
+              <a:rPr dirty="0"/>
+              <a:t>;</a:t>
             </a:r>
           </a:p>
           <a:p>
             <a:pPr lvl="0"/>
             <a:r>
-              <a:rPr/>
-              <a:t>где находятся пробелы и кто их устраняет;</a:t>
+              <a:rPr dirty="0" err="1"/>
+              <a:t>где</a:t>
+            </a:r>
+            <a:r>
+              <a:rPr dirty="0"/>
+              <a:t> </a:t>
+            </a:r>
+            <a:r>
+              <a:rPr dirty="0" err="1"/>
+              <a:t>находятся</a:t>
+            </a:r>
+            <a:r>
+              <a:rPr dirty="0"/>
+              <a:t> </a:t>
+            </a:r>
+            <a:r>
+              <a:rPr dirty="0" err="1"/>
+              <a:t>пробелы</a:t>
+            </a:r>
+            <a:r>
+              <a:rPr dirty="0"/>
+              <a:t> и </a:t>
+            </a:r>
+            <a:r>
+              <a:rPr dirty="0" err="1"/>
+              <a:t>кто</a:t>
+            </a:r>
+            <a:r>
+              <a:rPr dirty="0"/>
+              <a:t> </a:t>
+            </a:r>
+            <a:r>
+              <a:rPr dirty="0" err="1"/>
+              <a:t>их</a:t>
+            </a:r>
+            <a:r>
+              <a:rPr dirty="0"/>
+              <a:t> </a:t>
+            </a:r>
+            <a:r>
+              <a:rPr dirty="0" err="1"/>
+              <a:t>устраняет</a:t>
+            </a:r>
+            <a:r>
+              <a:rPr dirty="0"/>
+              <a:t>;</a:t>
             </a:r>
           </a:p>
           <a:p>
             <a:pPr lvl="0"/>
             <a:r>
-              <a:rPr/>
-              <a:t>какие факты могут потребовать отдельной правовой оценки.</a:t>
+              <a:rPr dirty="0" err="1"/>
+              <a:t>какие</a:t>
+            </a:r>
+            <a:r>
+              <a:rPr dirty="0"/>
+              <a:t> </a:t>
+            </a:r>
+            <a:r>
+              <a:rPr dirty="0" err="1"/>
+              <a:t>факты</a:t>
+            </a:r>
+            <a:r>
+              <a:rPr dirty="0"/>
+              <a:t> </a:t>
+            </a:r>
+            <a:r>
+              <a:rPr dirty="0" err="1"/>
+              <a:t>могут</a:t>
+            </a:r>
+            <a:r>
+              <a:rPr dirty="0"/>
+              <a:t> </a:t>
+            </a:r>
+            <a:r>
+              <a:rPr dirty="0" err="1"/>
+              <a:t>потребовать</a:t>
+            </a:r>
+            <a:r>
+              <a:rPr dirty="0"/>
+              <a:t> </a:t>
+            </a:r>
+            <a:r>
+              <a:rPr dirty="0" err="1"/>
+              <a:t>отдельной</a:t>
+            </a:r>
+            <a:r>
+              <a:rPr dirty="0"/>
+              <a:t> </a:t>
+            </a:r>
+            <a:r>
+              <a:rPr dirty="0" err="1"/>
+              <a:t>правовой</a:t>
+            </a:r>
+            <a:r>
+              <a:rPr dirty="0"/>
+              <a:t> </a:t>
+            </a:r>
+            <a:r>
+              <a:rPr dirty="0" err="1"/>
+              <a:t>оценки</a:t>
+            </a:r>
+            <a:r>
+              <a:rPr dirty="0"/>
+              <a:t>.</a:t>
             </a:r>
           </a:p>
         </p:txBody>
       </p:sp>
     </p:spTree>
   </p:cSld>
+  <p:clrMapOvr>
+    <a:masterClrMapping/>
+  </p:clrMapOvr>
 </p:sld>
 </file>
 
@@ -3736,11 +4076,10 @@
           <a:bodyPr/>
           <a:lstStyle/>
           <a:p>
-            <a:pPr lvl="0" indent="0" marL="0">
+            <a:pPr marL="0" lvl="0" indent="0">
               <a:buNone/>
             </a:pPr>
             <a:r>
-              <a:rPr/>
               <a:t>Три разных контура</a:t>
             </a:r>
           </a:p>
@@ -3754,11 +4093,16 @@
           </p:cNvGraphicFramePr>
           <p:nvPr>
             <p:ph idx="1"/>
+            <p:extLst>
+              <p:ext uri="{D42A27DB-BD31-4B8C-83A1-F6EECF244321}">
+                <p14:modId xmlns:p14="http://schemas.microsoft.com/office/powerpoint/2010/main" val="3950481537"/>
+              </p:ext>
+            </p:extLst>
           </p:nvPr>
         </p:nvGraphicFramePr>
         <p:xfrm>
           <a:off x="457200" y="787400"/>
-          <a:ext cx="8229600" cy="2400300"/>
+          <a:ext cx="8229600" cy="1805940"/>
         </p:xfrm>
         <a:graphic>
           <a:graphicData uri="http://schemas.openxmlformats.org/drawingml/2006/table">
@@ -3767,9 +4111,27 @@
                 <a:tableStyleId>{5C22544A-7EE6-4342-B048-85BDC9FD1C3A}</a:tableStyleId>
               </a:tblPr>
               <a:tblGrid>
-                <a:gridCol w="2743200"/>
-                <a:gridCol w="2743200"/>
-                <a:gridCol w="2743200"/>
+                <a:gridCol w="1916482">
+                  <a:extLst>
+                    <a:ext uri="{9D8B030D-6E8A-4147-A177-3AD203B41FA5}">
+                      <a16:colId xmlns:a16="http://schemas.microsoft.com/office/drawing/2014/main" val="20000"/>
+                    </a:ext>
+                  </a:extLst>
+                </a:gridCol>
+                <a:gridCol w="3569918">
+                  <a:extLst>
+                    <a:ext uri="{9D8B030D-6E8A-4147-A177-3AD203B41FA5}">
+                      <a16:colId xmlns:a16="http://schemas.microsoft.com/office/drawing/2014/main" val="20001"/>
+                    </a:ext>
+                  </a:extLst>
+                </a:gridCol>
+                <a:gridCol w="2743200">
+                  <a:extLst>
+                    <a:ext uri="{9D8B030D-6E8A-4147-A177-3AD203B41FA5}">
+                      <a16:colId xmlns:a16="http://schemas.microsoft.com/office/drawing/2014/main" val="20002"/>
+                    </a:ext>
+                  </a:extLst>
+                </a:gridCol>
               </a:tblGrid>
               <a:tr h="0">
                 <a:tc>
@@ -3777,11 +4139,10 @@
                     <a:bodyPr/>
                     <a:lstStyle/>
                     <a:p>
-                      <a:pPr lvl="0" indent="0" marL="0">
+                      <a:pPr marL="0" lvl="0" indent="0">
                         <a:buNone/>
                       </a:pPr>
                       <a:r>
-                        <a:rPr/>
                         <a:t>Контур</a:t>
                       </a:r>
                     </a:p>
@@ -3793,11 +4154,10 @@
                     <a:bodyPr/>
                     <a:lstStyle/>
                     <a:p>
-                      <a:pPr lvl="0" indent="0" marL="0">
+                      <a:pPr marL="0" lvl="0" indent="0">
                         <a:buNone/>
                       </a:pPr>
                       <a:r>
-                        <a:rPr/>
                         <a:t>Рабочий вопрос</a:t>
                       </a:r>
                     </a:p>
@@ -3809,17 +4169,21 @@
                     <a:bodyPr/>
                     <a:lstStyle/>
                     <a:p>
-                      <a:pPr lvl="0" indent="0" marL="0">
+                      <a:pPr marL="0" lvl="0" indent="0">
                         <a:buNone/>
                       </a:pPr>
                       <a:r>
-                        <a:rPr/>
                         <a:t>Результат</a:t>
                       </a:r>
                     </a:p>
                   </a:txBody>
                   <a:tcPr/>
                 </a:tc>
+                <a:extLst>
+                  <a:ext uri="{0D108BD9-81ED-4DB2-BD59-A6C34878D82A}">
+                    <a16:rowId xmlns:a16="http://schemas.microsoft.com/office/drawing/2014/main" val="10000"/>
+                  </a:ext>
+                </a:extLst>
               </a:tr>
               <a:tr h="0">
                 <a:tc>
@@ -3827,46 +4191,51 @@
                     <a:bodyPr/>
                     <a:lstStyle/>
                     <a:p>
-                      <a:pPr lvl="0" indent="0" marL="0">
+                      <a:pPr marL="0" lvl="0" indent="0">
                         <a:buNone/>
                       </a:pPr>
                       <a:r>
-                        <a:rPr/>
                         <a:t>Отраслевые условия</a:t>
                       </a:r>
                     </a:p>
                   </a:txBody>
+                  <a:tcPr/>
                 </a:tc>
                 <a:tc>
                   <a:txBody>
                     <a:bodyPr/>
                     <a:lstStyle/>
                     <a:p>
-                      <a:pPr lvl="0" indent="0" marL="0">
+                      <a:pPr marL="0" lvl="0" indent="0">
                         <a:buNone/>
                       </a:pPr>
                       <a:r>
-                        <a:rPr/>
                         <a:t>Уточняет ли отраслевой акт процедуру для объекта?</a:t>
                       </a:r>
                     </a:p>
                   </a:txBody>
+                  <a:tcPr/>
                 </a:tc>
                 <a:tc>
                   <a:txBody>
                     <a:bodyPr/>
                     <a:lstStyle/>
                     <a:p>
-                      <a:pPr lvl="0" indent="0" marL="0">
+                      <a:pPr marL="0" lvl="0" indent="0">
                         <a:buNone/>
                       </a:pPr>
                       <a:r>
-                        <a:rPr/>
                         <a:t>дополнение к карточке категорирования</a:t>
                       </a:r>
                     </a:p>
                   </a:txBody>
+                  <a:tcPr/>
                 </a:tc>
+                <a:extLst>
+                  <a:ext uri="{0D108BD9-81ED-4DB2-BD59-A6C34878D82A}">
+                    <a16:rowId xmlns:a16="http://schemas.microsoft.com/office/drawing/2014/main" val="10001"/>
+                  </a:ext>
+                </a:extLst>
               </a:tr>
               <a:tr h="0">
                 <a:tc>
@@ -3874,46 +4243,51 @@
                     <a:bodyPr/>
                     <a:lstStyle/>
                     <a:p>
-                      <a:pPr lvl="0" indent="0" marL="0">
+                      <a:pPr marL="0" lvl="0" indent="0">
                         <a:buNone/>
                       </a:pPr>
                       <a:r>
-                        <a:rPr/>
                         <a:t>Контроль</a:t>
                       </a:r>
                     </a:p>
                   </a:txBody>
+                  <a:tcPr/>
                 </a:tc>
                 <a:tc>
                   <a:txBody>
                     <a:bodyPr/>
                     <a:lstStyle/>
                     <a:p>
-                      <a:pPr lvl="0" indent="0" marL="0">
+                      <a:pPr marL="0" lvl="0" indent="0">
                         <a:buNone/>
                       </a:pPr>
                       <a:r>
-                        <a:rPr/>
                         <a:t>Какие доказательства выполнения обязанностей доступны?</a:t>
                       </a:r>
                     </a:p>
                   </a:txBody>
+                  <a:tcPr/>
                 </a:tc>
                 <a:tc>
                   <a:txBody>
                     <a:bodyPr/>
                     <a:lstStyle/>
                     <a:p>
-                      <a:pPr lvl="0" indent="0" marL="0">
+                      <a:pPr marL="0" lvl="0" indent="0">
                         <a:buNone/>
                       </a:pPr>
                       <a:r>
-                        <a:rPr/>
                         <a:t>проверочный лист доказательств</a:t>
                       </a:r>
                     </a:p>
                   </a:txBody>
+                  <a:tcPr/>
                 </a:tc>
+                <a:extLst>
+                  <a:ext uri="{0D108BD9-81ED-4DB2-BD59-A6C34878D82A}">
+                    <a16:rowId xmlns:a16="http://schemas.microsoft.com/office/drawing/2014/main" val="10002"/>
+                  </a:ext>
+                </a:extLst>
               </a:tr>
               <a:tr h="0">
                 <a:tc>
@@ -3921,46 +4295,61 @@
                     <a:bodyPr/>
                     <a:lstStyle/>
                     <a:p>
-                      <a:pPr lvl="0" indent="0" marL="0">
+                      <a:pPr marL="0" lvl="0" indent="0">
                         <a:buNone/>
                       </a:pPr>
                       <a:r>
-                        <a:rPr/>
                         <a:t>Правовой риск</a:t>
                       </a:r>
                     </a:p>
                   </a:txBody>
+                  <a:tcPr/>
                 </a:tc>
                 <a:tc>
                   <a:txBody>
                     <a:bodyPr/>
                     <a:lstStyle/>
                     <a:p>
-                      <a:pPr lvl="0" indent="0" marL="0">
+                      <a:pPr marL="0" lvl="0" indent="0">
                         <a:buNone/>
                       </a:pPr>
                       <a:r>
-                        <a:rPr/>
                         <a:t>Может ли факт потребовать специальной юридической оценки?</a:t>
                       </a:r>
                     </a:p>
                   </a:txBody>
+                  <a:tcPr/>
                 </a:tc>
                 <a:tc>
                   <a:txBody>
                     <a:bodyPr/>
                     <a:lstStyle/>
                     <a:p>
-                      <a:pPr lvl="0" indent="0" marL="0">
+                      <a:pPr marL="0" lvl="0" indent="0">
                         <a:buNone/>
                       </a:pPr>
                       <a:r>
-                        <a:rPr/>
-                        <a:t>карта риска, а не квалификация ответственности</a:t>
+                        <a:rPr dirty="0" err="1"/>
+                        <a:t>карта</a:t>
                       </a:r>
+                      <a:r>
+                        <a:rPr dirty="0"/>
+                        <a:t> </a:t>
+                      </a:r>
+                      <a:r>
+                        <a:rPr dirty="0" err="1"/>
+                        <a:t>риска</a:t>
+                      </a:r>
+                      <a:endParaRPr dirty="0"/>
                     </a:p>
                   </a:txBody>
+                  <a:tcPr/>
                 </a:tc>
+                <a:extLst>
+                  <a:ext uri="{0D108BD9-81ED-4DB2-BD59-A6C34878D82A}">
+                    <a16:rowId xmlns:a16="http://schemas.microsoft.com/office/drawing/2014/main" val="10003"/>
+                  </a:ext>
+                </a:extLst>
               </a:tr>
             </a:tbl>
           </a:graphicData>
@@ -3986,11 +4375,10 @@
           <a:bodyPr/>
           <a:lstStyle/>
           <a:p>
-            <a:pPr lvl="0" indent="0" marL="0">
+            <a:pPr marL="0" lvl="0" indent="0">
               <a:buNone/>
             </a:pPr>
             <a:r>
-              <a:rPr/>
               <a:t>Не смешивайте обязанность, доказательство и последствие нарушения.</a:t>
             </a:r>
           </a:p>
@@ -3998,6 +4386,9 @@
       </p:sp>
     </p:spTree>
   </p:cSld>
+  <p:clrMapOvr>
+    <a:masterClrMapping/>
+  </p:clrMapOvr>
 </p:sld>
 </file>
 
@@ -4033,11 +4424,10 @@
           <a:bodyPr/>
           <a:lstStyle/>
           <a:p>
-            <a:pPr lvl="0" indent="0" marL="0">
+            <a:pPr marL="0" lvl="0" indent="0">
               <a:buNone/>
             </a:pPr>
             <a:r>
-              <a:rPr/>
               <a:t>Отраслевые особенности</a:t>
             </a:r>
           </a:p>
@@ -4055,93 +4445,313 @@
         </p:nvSpPr>
         <p:spPr/>
         <p:txBody>
-          <a:bodyPr/>
+          <a:bodyPr>
+            <a:normAutofit/>
+          </a:bodyPr>
           <a:lstStyle/>
           <a:p>
-            <a:pPr lvl="0" indent="0" marL="0">
+            <a:pPr marL="0" lvl="0" indent="0">
               <a:buNone/>
             </a:pPr>
             <a:r>
-              <a:rPr/>
-              <a:t>Отраслевые особенности могут уточнять общую процедуру категорирования для определённых сфер.</a:t>
-            </a:r>
-          </a:p>
-          <a:p>
-            <a:pPr lvl="0" indent="0" marL="0">
+              <a:rPr dirty="0" err="1"/>
+              <a:t>Отраслевые</a:t>
+            </a:r>
+            <a:r>
+              <a:rPr dirty="0"/>
+              <a:t> </a:t>
+            </a:r>
+            <a:r>
+              <a:rPr dirty="0" err="1"/>
+              <a:t>особенности</a:t>
+            </a:r>
+            <a:r>
+              <a:rPr dirty="0"/>
+              <a:t> </a:t>
+            </a:r>
+            <a:r>
+              <a:rPr dirty="0" err="1"/>
+              <a:t>могут</a:t>
+            </a:r>
+            <a:r>
+              <a:rPr dirty="0"/>
+              <a:t> </a:t>
+            </a:r>
+            <a:r>
+              <a:rPr dirty="0" err="1"/>
+              <a:t>уточнять</a:t>
+            </a:r>
+            <a:r>
+              <a:rPr dirty="0"/>
+              <a:t> </a:t>
+            </a:r>
+            <a:r>
+              <a:rPr dirty="0" err="1"/>
+              <a:t>общую</a:t>
+            </a:r>
+            <a:r>
+              <a:rPr dirty="0"/>
+              <a:t> </a:t>
+            </a:r>
+            <a:r>
+              <a:rPr dirty="0" err="1"/>
+              <a:t>процедуру</a:t>
+            </a:r>
+            <a:r>
+              <a:rPr dirty="0"/>
+              <a:t> </a:t>
+            </a:r>
+            <a:r>
+              <a:rPr dirty="0" err="1"/>
+              <a:t>категорирования</a:t>
+            </a:r>
+            <a:r>
+              <a:rPr dirty="0"/>
+              <a:t> </a:t>
+            </a:r>
+            <a:r>
+              <a:rPr dirty="0" err="1"/>
+              <a:t>для</a:t>
+            </a:r>
+            <a:r>
+              <a:rPr dirty="0"/>
+              <a:t> </a:t>
+            </a:r>
+            <a:r>
+              <a:rPr dirty="0" err="1"/>
+              <a:t>определённых</a:t>
+            </a:r>
+            <a:r>
+              <a:rPr dirty="0"/>
+              <a:t> </a:t>
+            </a:r>
+            <a:r>
+              <a:rPr dirty="0" err="1"/>
+              <a:t>сфер</a:t>
+            </a:r>
+            <a:r>
+              <a:rPr dirty="0"/>
+              <a:t>.</a:t>
+            </a:r>
+          </a:p>
+          <a:p>
+            <a:pPr marL="0" lvl="0" indent="0">
               <a:buNone/>
             </a:pPr>
             <a:r>
-              <a:rPr/>
-              <a:t>Для каждого дополнительного условия проверяются:</a:t>
-            </a:r>
-          </a:p>
-          <a:p>
-            <a:pPr lvl="0" indent="-342900" marL="342900">
+              <a:rPr dirty="0" err="1"/>
+              <a:t>Для</a:t>
+            </a:r>
+            <a:r>
+              <a:rPr dirty="0"/>
+              <a:t> </a:t>
+            </a:r>
+            <a:r>
+              <a:rPr dirty="0" err="1"/>
+              <a:t>каждого</a:t>
+            </a:r>
+            <a:r>
+              <a:rPr dirty="0"/>
+              <a:t> </a:t>
+            </a:r>
+            <a:r>
+              <a:rPr dirty="0" err="1"/>
+              <a:t>дополнительного</a:t>
+            </a:r>
+            <a:r>
+              <a:rPr dirty="0"/>
+              <a:t> </a:t>
+            </a:r>
+            <a:r>
+              <a:rPr dirty="0" err="1"/>
+              <a:t>условия</a:t>
+            </a:r>
+            <a:r>
+              <a:rPr dirty="0"/>
+              <a:t> </a:t>
+            </a:r>
+            <a:r>
+              <a:rPr dirty="0" err="1"/>
+              <a:t>проверяются</a:t>
+            </a:r>
+            <a:r>
+              <a:rPr dirty="0"/>
+              <a:t>:</a:t>
+            </a:r>
+          </a:p>
+          <a:p>
+            <a:pPr marL="342900" lvl="0" indent="-342900">
               <a:buAutoNum type="arabicPeriod"/>
             </a:pPr>
             <a:r>
-              <a:rPr/>
-              <a:t>сфера и адресат акта;</a:t>
-            </a:r>
-          </a:p>
-          <a:p>
-            <a:pPr lvl="0" indent="-342900" marL="342900">
+              <a:rPr dirty="0" err="1"/>
+              <a:t>сфера</a:t>
+            </a:r>
+            <a:r>
+              <a:rPr dirty="0"/>
+              <a:t> и </a:t>
+            </a:r>
+            <a:r>
+              <a:rPr dirty="0" err="1"/>
+              <a:t>адресат</a:t>
+            </a:r>
+            <a:r>
+              <a:rPr dirty="0"/>
+              <a:t> </a:t>
+            </a:r>
+            <a:r>
+              <a:rPr dirty="0" err="1"/>
+              <a:t>акта</a:t>
+            </a:r>
+            <a:r>
+              <a:rPr dirty="0"/>
+              <a:t>;</a:t>
+            </a:r>
+          </a:p>
+          <a:p>
+            <a:pPr marL="342900" lvl="0" indent="-342900">
               <a:buAutoNum type="arabicPeriod"/>
             </a:pPr>
             <a:r>
-              <a:rPr/>
-              <a:t>редакция и дата действия;</a:t>
-            </a:r>
-          </a:p>
-          <a:p>
-            <a:pPr lvl="0" indent="-342900" marL="342900">
+              <a:rPr dirty="0" err="1"/>
+              <a:t>редакция</a:t>
+            </a:r>
+            <a:r>
+              <a:rPr dirty="0"/>
+              <a:t> и </a:t>
+            </a:r>
+            <a:r>
+              <a:rPr dirty="0" err="1"/>
+              <a:t>дата</a:t>
+            </a:r>
+            <a:r>
+              <a:rPr dirty="0"/>
+              <a:t> </a:t>
+            </a:r>
+            <a:r>
+              <a:rPr dirty="0" err="1"/>
+              <a:t>действия</a:t>
+            </a:r>
+            <a:r>
+              <a:rPr dirty="0"/>
+              <a:t>;</a:t>
+            </a:r>
+          </a:p>
+          <a:p>
+            <a:pPr marL="342900" lvl="0" indent="-342900">
               <a:buAutoNum type="arabicPeriod"/>
             </a:pPr>
             <a:r>
-              <a:rPr/>
-              <a:t>связь условия с границами объекта;</a:t>
-            </a:r>
-          </a:p>
-          <a:p>
-            <a:pPr lvl="0" indent="-342900" marL="342900">
+              <a:rPr dirty="0" err="1"/>
+              <a:t>связь</a:t>
+            </a:r>
+            <a:r>
+              <a:rPr dirty="0"/>
+              <a:t> </a:t>
+            </a:r>
+            <a:r>
+              <a:rPr dirty="0" err="1"/>
+              <a:t>условия</a:t>
+            </a:r>
+            <a:r>
+              <a:rPr dirty="0"/>
+              <a:t> с </a:t>
+            </a:r>
+            <a:r>
+              <a:rPr dirty="0" err="1"/>
+              <a:t>границами</a:t>
+            </a:r>
+            <a:r>
+              <a:rPr dirty="0"/>
+              <a:t> </a:t>
+            </a:r>
+            <a:r>
+              <a:rPr dirty="0" err="1"/>
+              <a:t>объекта</a:t>
+            </a:r>
+            <a:r>
+              <a:rPr dirty="0"/>
+              <a:t>;</a:t>
+            </a:r>
+          </a:p>
+          <a:p>
+            <a:pPr marL="342900" lvl="0" indent="-342900">
               <a:buAutoNum type="arabicPeriod"/>
             </a:pPr>
             <a:r>
-              <a:rPr/>
-              <a:t>владелец исполнения;</a:t>
-            </a:r>
-          </a:p>
-          <a:p>
-            <a:pPr lvl="0" indent="-342900" marL="342900">
+              <a:rPr dirty="0" err="1"/>
+              <a:t>владелец</a:t>
+            </a:r>
+            <a:r>
+              <a:rPr dirty="0"/>
+              <a:t> </a:t>
+            </a:r>
+            <a:r>
+              <a:rPr dirty="0" err="1"/>
+              <a:t>исполнения</a:t>
+            </a:r>
+            <a:r>
+              <a:rPr dirty="0"/>
+              <a:t>;</a:t>
+            </a:r>
+          </a:p>
+          <a:p>
+            <a:pPr marL="342900" lvl="0" indent="-342900">
               <a:buAutoNum type="arabicPeriod"/>
             </a:pPr>
             <a:r>
-              <a:rPr/>
-              <a:t>доказательство выполнения;</a:t>
-            </a:r>
-          </a:p>
-          <a:p>
-            <a:pPr lvl="0" indent="-342900" marL="342900">
+              <a:rPr dirty="0" err="1"/>
+              <a:t>доказательство</a:t>
+            </a:r>
+            <a:r>
+              <a:rPr dirty="0"/>
+              <a:t> </a:t>
+            </a:r>
+            <a:r>
+              <a:rPr dirty="0" err="1"/>
+              <a:t>выполнения</a:t>
+            </a:r>
+            <a:r>
+              <a:rPr dirty="0"/>
+              <a:t>;</a:t>
+            </a:r>
+          </a:p>
+          <a:p>
+            <a:pPr marL="342900" lvl="0" indent="-342900">
               <a:buAutoNum type="arabicPeriod"/>
             </a:pPr>
             <a:r>
-              <a:rPr/>
-              <a:t>срок и триггер пересмотра.</a:t>
-            </a:r>
-          </a:p>
-          <a:p>
-            <a:pPr lvl="0" indent="0" marL="0">
-              <a:buNone/>
-            </a:pPr>
-            <a:r>
-              <a:rPr/>
-              <a:t>Отраслевой акт не предполагается только из названия компании или системы.</a:t>
+              <a:rPr dirty="0" err="1"/>
+              <a:t>срок</a:t>
+            </a:r>
+            <a:r>
+              <a:rPr dirty="0"/>
+              <a:t> и </a:t>
+            </a:r>
+            <a:r>
+              <a:rPr dirty="0" err="1"/>
+              <a:t>триггер</a:t>
+            </a:r>
+            <a:r>
+              <a:rPr dirty="0"/>
+              <a:t> </a:t>
+            </a:r>
+            <a:r>
+              <a:rPr dirty="0" err="1"/>
+              <a:t>пересмотра</a:t>
+            </a:r>
+            <a:r>
+              <a:rPr dirty="0"/>
+              <a:t>.</a:t>
             </a:r>
           </a:p>
         </p:txBody>
       </p:sp>
     </p:spTree>
   </p:cSld>
+  <p:clrMapOvr>
+    <a:masterClrMapping/>
+  </p:clrMapOvr>
 </p:sld>
 </file>
 
@@ -4177,11 +4787,10 @@
           <a:bodyPr/>
           <a:lstStyle/>
           <a:p>
-            <a:pPr lvl="0" indent="0" marL="0">
+            <a:pPr marL="0" lvl="0" indent="0">
               <a:buNone/>
             </a:pPr>
             <a:r>
-              <a:rPr/>
               <a:t>Карта применимости отраслевого условия</a:t>
             </a:r>
           </a:p>
@@ -4199,7 +4808,7 @@
         </p:nvGraphicFramePr>
         <p:xfrm>
           <a:off x="457200" y="787400"/>
-          <a:ext cx="8229600" cy="2832100"/>
+          <a:ext cx="8229600" cy="2080260"/>
         </p:xfrm>
         <a:graphic>
           <a:graphicData uri="http://schemas.openxmlformats.org/drawingml/2006/table">
@@ -4208,8 +4817,20 @@
                 <a:tableStyleId>{5C22544A-7EE6-4342-B048-85BDC9FD1C3A}</a:tableStyleId>
               </a:tblPr>
               <a:tblGrid>
-                <a:gridCol w="4114800"/>
-                <a:gridCol w="4114800"/>
+                <a:gridCol w="4114800">
+                  <a:extLst>
+                    <a:ext uri="{9D8B030D-6E8A-4147-A177-3AD203B41FA5}">
+                      <a16:colId xmlns:a16="http://schemas.microsoft.com/office/drawing/2014/main" val="20000"/>
+                    </a:ext>
+                  </a:extLst>
+                </a:gridCol>
+                <a:gridCol w="4114800">
+                  <a:extLst>
+                    <a:ext uri="{9D8B030D-6E8A-4147-A177-3AD203B41FA5}">
+                      <a16:colId xmlns:a16="http://schemas.microsoft.com/office/drawing/2014/main" val="20001"/>
+                    </a:ext>
+                  </a:extLst>
+                </a:gridCol>
               </a:tblGrid>
               <a:tr h="0">
                 <a:tc>
@@ -4217,11 +4838,10 @@
                     <a:bodyPr/>
                     <a:lstStyle/>
                     <a:p>
-                      <a:pPr lvl="0" indent="0" marL="0">
+                      <a:pPr marL="0" lvl="0" indent="0">
                         <a:buNone/>
                       </a:pPr>
                       <a:r>
-                        <a:rPr/>
                         <a:t>Поле</a:t>
                       </a:r>
                     </a:p>
@@ -4233,17 +4853,21 @@
                     <a:bodyPr/>
                     <a:lstStyle/>
                     <a:p>
-                      <a:pPr lvl="0" indent="0" marL="0">
+                      <a:pPr marL="0" lvl="0" indent="0">
                         <a:buNone/>
                       </a:pPr>
                       <a:r>
-                        <a:rPr/>
                         <a:t>Что фиксируется</a:t>
                       </a:r>
                     </a:p>
                   </a:txBody>
                   <a:tcPr/>
                 </a:tc>
+                <a:extLst>
+                  <a:ext uri="{0D108BD9-81ED-4DB2-BD59-A6C34878D82A}">
+                    <a16:rowId xmlns:a16="http://schemas.microsoft.com/office/drawing/2014/main" val="10000"/>
+                  </a:ext>
+                </a:extLst>
               </a:tr>
               <a:tr h="0">
                 <a:tc>
@@ -4251,31 +4875,36 @@
                     <a:bodyPr/>
                     <a:lstStyle/>
                     <a:p>
-                      <a:pPr lvl="0" indent="0" marL="0">
+                      <a:pPr marL="0" lvl="0" indent="0">
                         <a:buNone/>
                       </a:pPr>
                       <a:r>
-                        <a:rPr/>
                         <a:t>Источник</a:t>
                       </a:r>
                     </a:p>
                   </a:txBody>
+                  <a:tcPr/>
                 </a:tc>
                 <a:tc>
                   <a:txBody>
                     <a:bodyPr/>
                     <a:lstStyle/>
                     <a:p>
-                      <a:pPr lvl="0" indent="0" marL="0">
+                      <a:pPr marL="0" lvl="0" indent="0">
                         <a:buNone/>
                       </a:pPr>
                       <a:r>
-                        <a:rPr/>
                         <a:t>официальный акт и редакция</a:t>
                       </a:r>
                     </a:p>
                   </a:txBody>
+                  <a:tcPr/>
                 </a:tc>
+                <a:extLst>
+                  <a:ext uri="{0D108BD9-81ED-4DB2-BD59-A6C34878D82A}">
+                    <a16:rowId xmlns:a16="http://schemas.microsoft.com/office/drawing/2014/main" val="10001"/>
+                  </a:ext>
+                </a:extLst>
               </a:tr>
               <a:tr h="0">
                 <a:tc>
@@ -4283,31 +4912,36 @@
                     <a:bodyPr/>
                     <a:lstStyle/>
                     <a:p>
-                      <a:pPr lvl="0" indent="0" marL="0">
+                      <a:pPr marL="0" lvl="0" indent="0">
                         <a:buNone/>
                       </a:pPr>
                       <a:r>
-                        <a:rPr/>
                         <a:t>Основание применимости</a:t>
                       </a:r>
                     </a:p>
                   </a:txBody>
+                  <a:tcPr/>
                 </a:tc>
                 <a:tc>
                   <a:txBody>
                     <a:bodyPr/>
                     <a:lstStyle/>
                     <a:p>
-                      <a:pPr lvl="0" indent="0" marL="0">
+                      <a:pPr marL="0" lvl="0" indent="0">
                         <a:buNone/>
                       </a:pPr>
                       <a:r>
-                        <a:rPr/>
                         <a:t>сфера, адресат, объект, дата</a:t>
                       </a:r>
                     </a:p>
                   </a:txBody>
+                  <a:tcPr/>
                 </a:tc>
+                <a:extLst>
+                  <a:ext uri="{0D108BD9-81ED-4DB2-BD59-A6C34878D82A}">
+                    <a16:rowId xmlns:a16="http://schemas.microsoft.com/office/drawing/2014/main" val="10002"/>
+                  </a:ext>
+                </a:extLst>
               </a:tr>
               <a:tr h="0">
                 <a:tc>
@@ -4315,31 +4949,36 @@
                     <a:bodyPr/>
                     <a:lstStyle/>
                     <a:p>
-                      <a:pPr lvl="0" indent="0" marL="0">
+                      <a:pPr marL="0" lvl="0" indent="0">
                         <a:buNone/>
                       </a:pPr>
                       <a:r>
-                        <a:rPr/>
                         <a:t>Дополнительное условие</a:t>
                       </a:r>
                     </a:p>
                   </a:txBody>
+                  <a:tcPr/>
                 </a:tc>
                 <a:tc>
                   <a:txBody>
                     <a:bodyPr/>
                     <a:lstStyle/>
                     <a:p>
-                      <a:pPr lvl="0" indent="0" marL="0">
+                      <a:pPr marL="0" lvl="0" indent="0">
                         <a:buNone/>
                       </a:pPr>
                       <a:r>
-                        <a:rPr/>
                         <a:t>что требуется сделать или учесть</a:t>
                       </a:r>
                     </a:p>
                   </a:txBody>
+                  <a:tcPr/>
                 </a:tc>
+                <a:extLst>
+                  <a:ext uri="{0D108BD9-81ED-4DB2-BD59-A6C34878D82A}">
+                    <a16:rowId xmlns:a16="http://schemas.microsoft.com/office/drawing/2014/main" val="10003"/>
+                  </a:ext>
+                </a:extLst>
               </a:tr>
               <a:tr h="0">
                 <a:tc>
@@ -4347,31 +4986,36 @@
                     <a:bodyPr/>
                     <a:lstStyle/>
                     <a:p>
-                      <a:pPr lvl="0" indent="0" marL="0">
+                      <a:pPr marL="0" lvl="0" indent="0">
                         <a:buNone/>
                       </a:pPr>
                       <a:r>
-                        <a:rPr/>
                         <a:t>Доказательство</a:t>
                       </a:r>
                     </a:p>
                   </a:txBody>
+                  <a:tcPr/>
                 </a:tc>
                 <a:tc>
                   <a:txBody>
                     <a:bodyPr/>
                     <a:lstStyle/>
                     <a:p>
-                      <a:pPr lvl="0" indent="0" marL="0">
+                      <a:pPr marL="0" lvl="0" indent="0">
                         <a:buNone/>
                       </a:pPr>
                       <a:r>
-                        <a:rPr/>
                         <a:t>документ, запись, расчёт, назначение роли</a:t>
                       </a:r>
                     </a:p>
                   </a:txBody>
+                  <a:tcPr/>
                 </a:tc>
+                <a:extLst>
+                  <a:ext uri="{0D108BD9-81ED-4DB2-BD59-A6C34878D82A}">
+                    <a16:rowId xmlns:a16="http://schemas.microsoft.com/office/drawing/2014/main" val="10004"/>
+                  </a:ext>
+                </a:extLst>
               </a:tr>
               <a:tr h="0">
                 <a:tc>
@@ -4379,31 +5023,36 @@
                     <a:bodyPr/>
                     <a:lstStyle/>
                     <a:p>
-                      <a:pPr lvl="0" indent="0" marL="0">
+                      <a:pPr marL="0" lvl="0" indent="0">
                         <a:buNone/>
                       </a:pPr>
                       <a:r>
-                        <a:rPr/>
                         <a:t>Ограничение</a:t>
                       </a:r>
                     </a:p>
                   </a:txBody>
+                  <a:tcPr/>
                 </a:tc>
                 <a:tc>
                   <a:txBody>
                     <a:bodyPr/>
                     <a:lstStyle/>
                     <a:p>
-                      <a:pPr lvl="0" indent="0" marL="0">
+                      <a:pPr marL="0" lvl="0" indent="0">
                         <a:buNone/>
                       </a:pPr>
                       <a:r>
-                        <a:rPr/>
                         <a:t>чего ещё нельзя утверждать</a:t>
                       </a:r>
                     </a:p>
                   </a:txBody>
+                  <a:tcPr/>
                 </a:tc>
+                <a:extLst>
+                  <a:ext uri="{0D108BD9-81ED-4DB2-BD59-A6C34878D82A}">
+                    <a16:rowId xmlns:a16="http://schemas.microsoft.com/office/drawing/2014/main" val="10005"/>
+                  </a:ext>
+                </a:extLst>
               </a:tr>
               <a:tr h="0">
                 <a:tc>
@@ -4411,31 +5060,36 @@
                     <a:bodyPr/>
                     <a:lstStyle/>
                     <a:p>
-                      <a:pPr lvl="0" indent="0" marL="0">
+                      <a:pPr marL="0" lvl="0" indent="0">
                         <a:buNone/>
                       </a:pPr>
                       <a:r>
-                        <a:rPr/>
                         <a:t>Действие</a:t>
                       </a:r>
                     </a:p>
                   </a:txBody>
+                  <a:tcPr/>
                 </a:tc>
                 <a:tc>
                   <a:txBody>
                     <a:bodyPr/>
                     <a:lstStyle/>
                     <a:p>
-                      <a:pPr lvl="0" indent="0" marL="0">
+                      <a:pPr marL="0" lvl="0" indent="0">
                         <a:buNone/>
                       </a:pPr>
                       <a:r>
-                        <a:rPr/>
                         <a:t>владелец, срок, пересмотр</a:t>
                       </a:r>
                     </a:p>
                   </a:txBody>
+                  <a:tcPr/>
                 </a:tc>
+                <a:extLst>
+                  <a:ext uri="{0D108BD9-81ED-4DB2-BD59-A6C34878D82A}">
+                    <a16:rowId xmlns:a16="http://schemas.microsoft.com/office/drawing/2014/main" val="10006"/>
+                  </a:ext>
+                </a:extLst>
               </a:tr>
             </a:tbl>
           </a:graphicData>
@@ -4461,11 +5115,10 @@
           <a:bodyPr/>
           <a:lstStyle/>
           <a:p>
-            <a:pPr lvl="0" indent="0" marL="0">
+            <a:pPr marL="0" lvl="0" indent="0">
               <a:buNone/>
             </a:pPr>
             <a:r>
-              <a:rPr/>
               <a:t>Карта становится приложением к карточке решения о категорировании.</a:t>
             </a:r>
           </a:p>
@@ -4473,6 +5126,9 @@
       </p:sp>
     </p:spTree>
   </p:cSld>
+  <p:clrMapOvr>
+    <a:masterClrMapping/>
+  </p:clrMapOvr>
 </p:sld>
 </file>
 
@@ -4508,11 +5164,10 @@
           <a:bodyPr/>
           <a:lstStyle/>
           <a:p>
-            <a:pPr lvl="0" indent="0" marL="0">
+            <a:pPr marL="0" lvl="0" indent="0">
               <a:buNone/>
             </a:pPr>
             <a:r>
-              <a:rPr/>
               <a:t>Контроль как проверка доказательств</a:t>
             </a:r>
           </a:p>
@@ -4533,62 +5188,326 @@
           <a:bodyPr/>
           <a:lstStyle/>
           <a:p>
-            <a:pPr lvl="0" indent="0" marL="0">
+            <a:pPr marL="0" lvl="0" indent="0">
               <a:buNone/>
             </a:pPr>
             <a:r>
-              <a:rPr/>
-              <a:t>Проверка соответствия начинается не с поиска наказания, а с вопросов:</a:t>
+              <a:rPr dirty="0" err="1"/>
+              <a:t>Проверка</a:t>
+            </a:r>
+            <a:r>
+              <a:rPr dirty="0"/>
+              <a:t> </a:t>
+            </a:r>
+            <a:r>
+              <a:rPr dirty="0" err="1"/>
+              <a:t>соответствия</a:t>
+            </a:r>
+            <a:r>
+              <a:rPr dirty="0"/>
+              <a:t> </a:t>
+            </a:r>
+            <a:r>
+              <a:rPr dirty="0" err="1"/>
+              <a:t>начинается</a:t>
+            </a:r>
+            <a:r>
+              <a:rPr dirty="0"/>
+              <a:t> </a:t>
+            </a:r>
+            <a:r>
+              <a:rPr dirty="0" err="1"/>
+              <a:t>не</a:t>
+            </a:r>
+            <a:r>
+              <a:rPr dirty="0"/>
+              <a:t> с </a:t>
+            </a:r>
+            <a:r>
+              <a:rPr dirty="0" err="1"/>
+              <a:t>поиска</a:t>
+            </a:r>
+            <a:r>
+              <a:rPr dirty="0"/>
+              <a:t> </a:t>
+            </a:r>
+            <a:r>
+              <a:rPr dirty="0" err="1"/>
+              <a:t>наказания</a:t>
+            </a:r>
+            <a:r>
+              <a:rPr dirty="0"/>
+              <a:t>, а с </a:t>
+            </a:r>
+            <a:r>
+              <a:rPr dirty="0" err="1"/>
+              <a:t>вопросов</a:t>
+            </a:r>
+            <a:r>
+              <a:rPr dirty="0"/>
+              <a:t>:</a:t>
             </a:r>
           </a:p>
           <a:p>
             <a:pPr lvl="0"/>
             <a:r>
-              <a:rPr/>
-              <a:t>какому требованию соответствует действие;</a:t>
+              <a:rPr dirty="0" err="1"/>
+              <a:t>какому</a:t>
+            </a:r>
+            <a:r>
+              <a:rPr dirty="0"/>
+              <a:t> </a:t>
+            </a:r>
+            <a:r>
+              <a:rPr dirty="0" err="1"/>
+              <a:t>требованию</a:t>
+            </a:r>
+            <a:r>
+              <a:rPr dirty="0"/>
+              <a:t> </a:t>
+            </a:r>
+            <a:r>
+              <a:rPr dirty="0" err="1"/>
+              <a:t>соответствует</a:t>
+            </a:r>
+            <a:r>
+              <a:rPr dirty="0"/>
+              <a:t> </a:t>
+            </a:r>
+            <a:r>
+              <a:rPr dirty="0" err="1"/>
+              <a:t>действие</a:t>
+            </a:r>
+            <a:r>
+              <a:rPr dirty="0"/>
+              <a:t>;</a:t>
             </a:r>
           </a:p>
           <a:p>
             <a:pPr lvl="0"/>
             <a:r>
-              <a:rPr/>
-              <a:t>какой документ или запись доказывает выполнение;</a:t>
+              <a:rPr dirty="0" err="1"/>
+              <a:t>какой</a:t>
+            </a:r>
+            <a:r>
+              <a:rPr dirty="0"/>
+              <a:t> </a:t>
+            </a:r>
+            <a:r>
+              <a:rPr dirty="0" err="1"/>
+              <a:t>документ</a:t>
+            </a:r>
+            <a:r>
+              <a:rPr dirty="0"/>
+              <a:t> </a:t>
+            </a:r>
+            <a:r>
+              <a:rPr dirty="0" err="1"/>
+              <a:t>или</a:t>
+            </a:r>
+            <a:r>
+              <a:rPr dirty="0"/>
+              <a:t> </a:t>
+            </a:r>
+            <a:r>
+              <a:rPr dirty="0" err="1"/>
+              <a:t>запись</a:t>
+            </a:r>
+            <a:r>
+              <a:rPr dirty="0"/>
+              <a:t> </a:t>
+            </a:r>
+            <a:r>
+              <a:rPr dirty="0" err="1"/>
+              <a:t>доказывает</a:t>
+            </a:r>
+            <a:r>
+              <a:rPr dirty="0"/>
+              <a:t> </a:t>
+            </a:r>
+            <a:r>
+              <a:rPr dirty="0" err="1"/>
+              <a:t>выполнение</a:t>
+            </a:r>
+            <a:r>
+              <a:rPr dirty="0"/>
+              <a:t>;</a:t>
             </a:r>
           </a:p>
           <a:p>
             <a:pPr lvl="0"/>
             <a:r>
-              <a:rPr/>
-              <a:t>где хранится доказательство и кто за него отвечает;</a:t>
+              <a:rPr dirty="0" err="1"/>
+              <a:t>где</a:t>
+            </a:r>
+            <a:r>
+              <a:rPr dirty="0"/>
+              <a:t> </a:t>
+            </a:r>
+            <a:r>
+              <a:rPr dirty="0" err="1"/>
+              <a:t>хранится</a:t>
+            </a:r>
+            <a:r>
+              <a:rPr dirty="0"/>
+              <a:t> </a:t>
+            </a:r>
+            <a:r>
+              <a:rPr dirty="0" err="1"/>
+              <a:t>доказательство</a:t>
+            </a:r>
+            <a:r>
+              <a:rPr dirty="0"/>
+              <a:t> и </a:t>
+            </a:r>
+            <a:r>
+              <a:rPr dirty="0" err="1"/>
+              <a:t>кто</a:t>
+            </a:r>
+            <a:r>
+              <a:rPr dirty="0"/>
+              <a:t> </a:t>
+            </a:r>
+            <a:r>
+              <a:rPr dirty="0" err="1"/>
+              <a:t>за</a:t>
+            </a:r>
+            <a:r>
+              <a:rPr dirty="0"/>
+              <a:t> </a:t>
+            </a:r>
+            <a:r>
+              <a:rPr dirty="0" err="1"/>
+              <a:t>него</a:t>
+            </a:r>
+            <a:r>
+              <a:rPr dirty="0"/>
+              <a:t> </a:t>
+            </a:r>
+            <a:r>
+              <a:rPr dirty="0" err="1"/>
+              <a:t>отвечает</a:t>
+            </a:r>
+            <a:r>
+              <a:rPr dirty="0"/>
+              <a:t>;</a:t>
             </a:r>
           </a:p>
           <a:p>
             <a:pPr lvl="0"/>
             <a:r>
-              <a:rPr/>
-              <a:t>насколько оно актуально и применимо к объекту;</a:t>
+              <a:rPr dirty="0" err="1"/>
+              <a:t>насколько</a:t>
+            </a:r>
+            <a:r>
+              <a:rPr dirty="0"/>
+              <a:t> </a:t>
+            </a:r>
+            <a:r>
+              <a:rPr dirty="0" err="1"/>
+              <a:t>оно</a:t>
+            </a:r>
+            <a:r>
+              <a:rPr dirty="0"/>
+              <a:t> </a:t>
+            </a:r>
+            <a:r>
+              <a:rPr dirty="0" err="1"/>
+              <a:t>актуально</a:t>
+            </a:r>
+            <a:r>
+              <a:rPr dirty="0"/>
+              <a:t> и </a:t>
+            </a:r>
+            <a:r>
+              <a:rPr dirty="0" err="1"/>
+              <a:t>применимо</a:t>
+            </a:r>
+            <a:r>
+              <a:rPr dirty="0"/>
+              <a:t> к </a:t>
+            </a:r>
+            <a:r>
+              <a:rPr dirty="0" err="1"/>
+              <a:t>объекту</a:t>
+            </a:r>
+            <a:r>
+              <a:rPr dirty="0"/>
+              <a:t>;</a:t>
             </a:r>
           </a:p>
           <a:p>
             <a:pPr lvl="0"/>
             <a:r>
-              <a:rPr/>
-              <a:t>что делать, если доказательство отсутствует или противоречиво.</a:t>
-            </a:r>
-          </a:p>
-          <a:p>
-            <a:pPr lvl="0" indent="0" marL="0">
+              <a:rPr dirty="0" err="1"/>
+              <a:t>что</a:t>
+            </a:r>
+            <a:r>
+              <a:rPr dirty="0"/>
+              <a:t> </a:t>
+            </a:r>
+            <a:r>
+              <a:rPr dirty="0" err="1"/>
+              <a:t>делать</a:t>
+            </a:r>
+            <a:r>
+              <a:rPr dirty="0"/>
+              <a:t>, </a:t>
+            </a:r>
+            <a:r>
+              <a:rPr dirty="0" err="1"/>
+              <a:t>если</a:t>
+            </a:r>
+            <a:r>
+              <a:rPr dirty="0"/>
+              <a:t> </a:t>
+            </a:r>
+            <a:r>
+              <a:rPr dirty="0" err="1"/>
+              <a:t>доказательство</a:t>
+            </a:r>
+            <a:r>
+              <a:rPr dirty="0"/>
+              <a:t> </a:t>
+            </a:r>
+            <a:r>
+              <a:rPr dirty="0" err="1"/>
+              <a:t>отсутствует</a:t>
+            </a:r>
+            <a:r>
+              <a:rPr dirty="0"/>
+              <a:t> </a:t>
+            </a:r>
+            <a:r>
+              <a:rPr dirty="0" err="1"/>
+              <a:t>или</a:t>
+            </a:r>
+            <a:r>
+              <a:rPr dirty="0"/>
+              <a:t> </a:t>
+            </a:r>
+            <a:r>
+              <a:rPr dirty="0" err="1"/>
+              <a:t>противоречиво</a:t>
+            </a:r>
+            <a:r>
+              <a:rPr dirty="0"/>
+              <a:t>.</a:t>
+            </a:r>
+          </a:p>
+          <a:p>
+            <a:pPr marL="0" lvl="0" indent="0">
               <a:buNone/>
             </a:pPr>
-            <a:r>
-              <a:rPr/>
-              <a:t>Внутренняя учебная проверка не имитирует полномочия государственного органа.</a:t>
-            </a:r>
+            <a:endParaRPr dirty="0"/>
           </a:p>
         </p:txBody>
       </p:sp>
     </p:spTree>
   </p:cSld>
+  <p:clrMapOvr>
+    <a:masterClrMapping/>
+  </p:clrMapOvr>
 </p:sld>
 </file>
 
@@ -4624,11 +5543,10 @@
           <a:bodyPr/>
           <a:lstStyle/>
           <a:p>
-            <a:pPr lvl="0" indent="0" marL="0">
+            <a:pPr marL="0" lvl="0" indent="0">
               <a:buNone/>
             </a:pPr>
             <a:r>
-              <a:rPr/>
               <a:t>Реестр соответствия и пробелов</a:t>
             </a:r>
           </a:p>
@@ -4646,7 +5564,7 @@
         </p:nvGraphicFramePr>
         <p:xfrm>
           <a:off x="457200" y="787400"/>
-          <a:ext cx="8229600" cy="1778000"/>
+          <a:ext cx="8229600" cy="1005840"/>
         </p:xfrm>
         <a:graphic>
           <a:graphicData uri="http://schemas.openxmlformats.org/drawingml/2006/table">
@@ -4655,12 +5573,48 @@
                 <a:tableStyleId>{5C22544A-7EE6-4342-B048-85BDC9FD1C3A}</a:tableStyleId>
               </a:tblPr>
               <a:tblGrid>
-                <a:gridCol w="1371600"/>
-                <a:gridCol w="1371600"/>
-                <a:gridCol w="1371600"/>
-                <a:gridCol w="1371600"/>
-                <a:gridCol w="1371600"/>
-                <a:gridCol w="1371600"/>
+                <a:gridCol w="1371600">
+                  <a:extLst>
+                    <a:ext uri="{9D8B030D-6E8A-4147-A177-3AD203B41FA5}">
+                      <a16:colId xmlns:a16="http://schemas.microsoft.com/office/drawing/2014/main" val="20000"/>
+                    </a:ext>
+                  </a:extLst>
+                </a:gridCol>
+                <a:gridCol w="1371600">
+                  <a:extLst>
+                    <a:ext uri="{9D8B030D-6E8A-4147-A177-3AD203B41FA5}">
+                      <a16:colId xmlns:a16="http://schemas.microsoft.com/office/drawing/2014/main" val="20001"/>
+                    </a:ext>
+                  </a:extLst>
+                </a:gridCol>
+                <a:gridCol w="1371600">
+                  <a:extLst>
+                    <a:ext uri="{9D8B030D-6E8A-4147-A177-3AD203B41FA5}">
+                      <a16:colId xmlns:a16="http://schemas.microsoft.com/office/drawing/2014/main" val="20002"/>
+                    </a:ext>
+                  </a:extLst>
+                </a:gridCol>
+                <a:gridCol w="1371600">
+                  <a:extLst>
+                    <a:ext uri="{9D8B030D-6E8A-4147-A177-3AD203B41FA5}">
+                      <a16:colId xmlns:a16="http://schemas.microsoft.com/office/drawing/2014/main" val="20003"/>
+                    </a:ext>
+                  </a:extLst>
+                </a:gridCol>
+                <a:gridCol w="1371600">
+                  <a:extLst>
+                    <a:ext uri="{9D8B030D-6E8A-4147-A177-3AD203B41FA5}">
+                      <a16:colId xmlns:a16="http://schemas.microsoft.com/office/drawing/2014/main" val="20004"/>
+                    </a:ext>
+                  </a:extLst>
+                </a:gridCol>
+                <a:gridCol w="1371600">
+                  <a:extLst>
+                    <a:ext uri="{9D8B030D-6E8A-4147-A177-3AD203B41FA5}">
+                      <a16:colId xmlns:a16="http://schemas.microsoft.com/office/drawing/2014/main" val="20005"/>
+                    </a:ext>
+                  </a:extLst>
+                </a:gridCol>
               </a:tblGrid>
               <a:tr h="0">
                 <a:tc>
@@ -4668,11 +5622,10 @@
                     <a:bodyPr/>
                     <a:lstStyle/>
                     <a:p>
-                      <a:pPr lvl="0" indent="0" marL="0">
+                      <a:pPr marL="0" lvl="0" indent="0">
                         <a:buNone/>
                       </a:pPr>
                       <a:r>
-                        <a:rPr/>
                         <a:t>Требование</a:t>
                       </a:r>
                     </a:p>
@@ -4684,11 +5637,10 @@
                     <a:bodyPr/>
                     <a:lstStyle/>
                     <a:p>
-                      <a:pPr lvl="0" indent="0" marL="0">
+                      <a:pPr marL="0" lvl="0" indent="0">
                         <a:buNone/>
                       </a:pPr>
                       <a:r>
-                        <a:rPr/>
                         <a:t>Применимость</a:t>
                       </a:r>
                     </a:p>
@@ -4700,11 +5652,10 @@
                     <a:bodyPr/>
                     <a:lstStyle/>
                     <a:p>
-                      <a:pPr lvl="0" indent="0" marL="0">
+                      <a:pPr marL="0" lvl="0" indent="0">
                         <a:buNone/>
                       </a:pPr>
                       <a:r>
-                        <a:rPr/>
                         <a:t>Доказательство</a:t>
                       </a:r>
                     </a:p>
@@ -4716,11 +5667,10 @@
                     <a:bodyPr/>
                     <a:lstStyle/>
                     <a:p>
-                      <a:pPr lvl="0" indent="0" marL="0">
+                      <a:pPr marL="0" lvl="0" indent="0">
                         <a:buNone/>
                       </a:pPr>
                       <a:r>
-                        <a:rPr/>
                         <a:t>Статус</a:t>
                       </a:r>
                     </a:p>
@@ -4732,11 +5682,10 @@
                     <a:bodyPr/>
                     <a:lstStyle/>
                     <a:p>
-                      <a:pPr lvl="0" indent="0" marL="0">
+                      <a:pPr marL="0" lvl="0" indent="0">
                         <a:buNone/>
                       </a:pPr>
                       <a:r>
-                        <a:rPr/>
                         <a:t>Пробел</a:t>
                       </a:r>
                     </a:p>
@@ -4748,17 +5697,21 @@
                     <a:bodyPr/>
                     <a:lstStyle/>
                     <a:p>
-                      <a:pPr lvl="0" indent="0" marL="0">
+                      <a:pPr marL="0" lvl="0" indent="0">
                         <a:buNone/>
                       </a:pPr>
                       <a:r>
-                        <a:rPr/>
                         <a:t>Действие</a:t>
                       </a:r>
                     </a:p>
                   </a:txBody>
                   <a:tcPr/>
                 </a:tc>
+                <a:extLst>
+                  <a:ext uri="{0D108BD9-81ED-4DB2-BD59-A6C34878D82A}">
+                    <a16:rowId xmlns:a16="http://schemas.microsoft.com/office/drawing/2014/main" val="10000"/>
+                  </a:ext>
+                </a:extLst>
               </a:tr>
               <a:tr h="0">
                 <a:tc>
@@ -4766,91 +5719,96 @@
                     <a:bodyPr/>
                     <a:lstStyle/>
                     <a:p>
-                      <a:pPr lvl="0" indent="0" marL="0">
+                      <a:pPr marL="0" lvl="0" indent="0">
                         <a:buNone/>
                       </a:pPr>
                       <a:r>
-                        <a:rPr/>
                         <a:t>Нормативное или внутреннее условие</a:t>
                       </a:r>
                     </a:p>
                   </a:txBody>
+                  <a:tcPr/>
                 </a:tc>
                 <a:tc>
                   <a:txBody>
                     <a:bodyPr/>
                     <a:lstStyle/>
                     <a:p>
-                      <a:pPr lvl="0" indent="0" marL="0">
+                      <a:pPr marL="0" lvl="0" indent="0">
                         <a:buNone/>
                       </a:pPr>
                       <a:r>
-                        <a:rPr/>
                         <a:t>почему относится к объекту</a:t>
                       </a:r>
                     </a:p>
                   </a:txBody>
+                  <a:tcPr/>
                 </a:tc>
                 <a:tc>
                   <a:txBody>
                     <a:bodyPr/>
                     <a:lstStyle/>
                     <a:p>
-                      <a:pPr lvl="0" indent="0" marL="0">
+                      <a:pPr marL="0" lvl="0" indent="0">
                         <a:buNone/>
                       </a:pPr>
                       <a:r>
-                        <a:rPr/>
                         <a:t>источник и владелец</a:t>
                       </a:r>
                     </a:p>
                   </a:txBody>
+                  <a:tcPr/>
                 </a:tc>
                 <a:tc>
                   <a:txBody>
                     <a:bodyPr/>
                     <a:lstStyle/>
                     <a:p>
-                      <a:pPr lvl="0" indent="0" marL="0">
+                      <a:pPr marL="0" lvl="0" indent="0">
                         <a:buNone/>
                       </a:pPr>
                       <a:r>
-                        <a:rPr/>
                         <a:t>подтверждено / частично / не подтверждено</a:t>
                       </a:r>
                     </a:p>
                   </a:txBody>
+                  <a:tcPr/>
                 </a:tc>
                 <a:tc>
                   <a:txBody>
                     <a:bodyPr/>
                     <a:lstStyle/>
                     <a:p>
-                      <a:pPr lvl="0" indent="0" marL="0">
+                      <a:pPr marL="0" lvl="0" indent="0">
                         <a:buNone/>
                       </a:pPr>
                       <a:r>
-                        <a:rPr/>
                         <a:t>чего не хватает</a:t>
                       </a:r>
                     </a:p>
                   </a:txBody>
+                  <a:tcPr/>
                 </a:tc>
                 <a:tc>
                   <a:txBody>
                     <a:bodyPr/>
                     <a:lstStyle/>
                     <a:p>
-                      <a:pPr lvl="0" indent="0" marL="0">
+                      <a:pPr marL="0" lvl="0" indent="0">
                         <a:buNone/>
                       </a:pPr>
                       <a:r>
-                        <a:rPr/>
                         <a:t>кто и к какому сроку исправляет</a:t>
                       </a:r>
                     </a:p>
                   </a:txBody>
+                  <a:tcPr/>
                 </a:tc>
+                <a:extLst>
+                  <a:ext uri="{0D108BD9-81ED-4DB2-BD59-A6C34878D82A}">
+                    <a16:rowId xmlns:a16="http://schemas.microsoft.com/office/drawing/2014/main" val="10001"/>
+                  </a:ext>
+                </a:extLst>
               </a:tr>
             </a:tbl>
           </a:graphicData>
@@ -4876,18 +5834,89 @@
           <a:bodyPr/>
           <a:lstStyle/>
           <a:p>
-            <a:pPr lvl="0" indent="0" marL="0">
+            <a:pPr marL="0" lvl="0" indent="0">
               <a:buNone/>
             </a:pPr>
             <a:r>
-              <a:rPr/>
-              <a:t>Реестр поддерживает управляемое устранение пробелов, а не декларацию соответствия.</a:t>
+              <a:rPr dirty="0" err="1"/>
+              <a:t>Реестр</a:t>
+            </a:r>
+            <a:r>
+              <a:rPr dirty="0"/>
+              <a:t> </a:t>
+            </a:r>
+            <a:r>
+              <a:rPr dirty="0" err="1"/>
+              <a:t>поддерживает</a:t>
+            </a:r>
+            <a:r>
+              <a:rPr dirty="0"/>
+              <a:t> </a:t>
+            </a:r>
+            <a:r>
+              <a:rPr dirty="0" err="1"/>
+              <a:t>управляемое</a:t>
+            </a:r>
+            <a:r>
+              <a:rPr dirty="0"/>
+              <a:t> </a:t>
+            </a:r>
+            <a:r>
+              <a:rPr dirty="0" err="1"/>
+              <a:t>устранение</a:t>
+            </a:r>
+            <a:r>
+              <a:rPr dirty="0"/>
+              <a:t> </a:t>
+            </a:r>
+            <a:r>
+              <a:rPr dirty="0" err="1"/>
+              <a:t>пробелов</a:t>
+            </a:r>
+            <a:r>
+              <a:rPr lang="ru-RU" dirty="0"/>
+              <a:t> (это </a:t>
+            </a:r>
+            <a:r>
+              <a:rPr dirty="0" err="1"/>
+              <a:t>не</a:t>
+            </a:r>
+            <a:r>
+              <a:rPr dirty="0"/>
+              <a:t> </a:t>
+            </a:r>
+            <a:r>
+              <a:rPr dirty="0" err="1"/>
+              <a:t>деклараци</a:t>
+            </a:r>
+            <a:r>
+              <a:rPr lang="ru-RU" dirty="0"/>
+              <a:t>я</a:t>
+            </a:r>
+            <a:r>
+              <a:rPr dirty="0"/>
+              <a:t> </a:t>
+            </a:r>
+            <a:r>
+              <a:rPr dirty="0" err="1"/>
+              <a:t>соответствия</a:t>
+            </a:r>
+            <a:r>
+              <a:rPr lang="ru-RU" dirty="0"/>
+              <a:t>)</a:t>
+            </a:r>
+            <a:r>
+              <a:rPr dirty="0"/>
+              <a:t>.</a:t>
             </a:r>
           </a:p>
         </p:txBody>
       </p:sp>
     </p:spTree>
   </p:cSld>
+  <p:clrMapOvr>
+    <a:masterClrMapping/>
+  </p:clrMapOvr>
 </p:sld>
 </file>
 
@@ -4923,11 +5952,10 @@
           <a:bodyPr/>
           <a:lstStyle/>
           <a:p>
-            <a:pPr lvl="0" indent="0" marL="0">
+            <a:pPr marL="0" lvl="0" indent="0">
               <a:buNone/>
             </a:pPr>
             <a:r>
-              <a:rPr/>
               <a:t>Риск и юридическая оценка</a:t>
             </a:r>
           </a:p>
@@ -4948,71 +5976,295 @@
           <a:bodyPr/>
           <a:lstStyle/>
           <a:p>
-            <a:pPr lvl="0" indent="0" marL="0">
+            <a:pPr marL="0" lvl="0" indent="0">
               <a:buNone/>
             </a:pPr>
             <a:r>
-              <a:rPr/>
-              <a:t>Факт несоответствия не равен автоматически административному составу.</a:t>
-            </a:r>
-          </a:p>
-          <a:p>
-            <a:pPr lvl="0" indent="0" marL="0">
+              <a:rPr dirty="0" err="1"/>
+              <a:t>Факт</a:t>
+            </a:r>
+            <a:r>
+              <a:rPr dirty="0"/>
+              <a:t> </a:t>
+            </a:r>
+            <a:r>
+              <a:rPr dirty="0" err="1"/>
+              <a:t>несоответствия</a:t>
+            </a:r>
+            <a:r>
+              <a:rPr dirty="0"/>
+              <a:t> </a:t>
+            </a:r>
+            <a:r>
+              <a:rPr dirty="0" err="1"/>
+              <a:t>не</a:t>
+            </a:r>
+            <a:r>
+              <a:rPr dirty="0"/>
+              <a:t> </a:t>
+            </a:r>
+            <a:r>
+              <a:rPr dirty="0" err="1"/>
+              <a:t>равен</a:t>
+            </a:r>
+            <a:r>
+              <a:rPr dirty="0"/>
+              <a:t> </a:t>
+            </a:r>
+            <a:r>
+              <a:rPr dirty="0" err="1"/>
+              <a:t>автоматически</a:t>
+            </a:r>
+            <a:r>
+              <a:rPr dirty="0"/>
+              <a:t> </a:t>
+            </a:r>
+            <a:r>
+              <a:rPr dirty="0" err="1"/>
+              <a:t>административному</a:t>
+            </a:r>
+            <a:r>
+              <a:rPr dirty="0"/>
+              <a:t> </a:t>
+            </a:r>
+            <a:r>
+              <a:rPr dirty="0" err="1"/>
+              <a:t>составу</a:t>
+            </a:r>
+            <a:r>
+              <a:rPr dirty="0"/>
+              <a:t>.</a:t>
+            </a:r>
+          </a:p>
+          <a:p>
+            <a:pPr marL="0" lvl="0" indent="0">
               <a:buNone/>
             </a:pPr>
             <a:r>
-              <a:rPr/>
-              <a:t>Чтобы оценивать правовой риск, необходимо отдельно установить:</a:t>
+              <a:rPr dirty="0" err="1"/>
+              <a:t>Чтобы</a:t>
+            </a:r>
+            <a:r>
+              <a:rPr dirty="0"/>
+              <a:t> </a:t>
+            </a:r>
+            <a:r>
+              <a:rPr dirty="0" err="1"/>
+              <a:t>оценивать</a:t>
+            </a:r>
+            <a:r>
+              <a:rPr dirty="0"/>
+              <a:t> </a:t>
+            </a:r>
+            <a:r>
+              <a:rPr dirty="0" err="1"/>
+              <a:t>правовой</a:t>
+            </a:r>
+            <a:r>
+              <a:rPr dirty="0"/>
+              <a:t> </a:t>
+            </a:r>
+            <a:r>
+              <a:rPr dirty="0" err="1"/>
+              <a:t>риск</a:t>
+            </a:r>
+            <a:r>
+              <a:rPr dirty="0"/>
+              <a:t>, </a:t>
+            </a:r>
+            <a:r>
+              <a:rPr dirty="0" err="1"/>
+              <a:t>необходимо</a:t>
+            </a:r>
+            <a:r>
+              <a:rPr dirty="0"/>
+              <a:t> </a:t>
+            </a:r>
+            <a:r>
+              <a:rPr dirty="0" err="1"/>
+              <a:t>отдельно</a:t>
+            </a:r>
+            <a:r>
+              <a:rPr dirty="0"/>
+              <a:t> </a:t>
+            </a:r>
+            <a:r>
+              <a:rPr dirty="0" err="1"/>
+              <a:t>установить</a:t>
+            </a:r>
+            <a:r>
+              <a:rPr dirty="0"/>
+              <a:t>:</a:t>
             </a:r>
           </a:p>
           <a:p>
             <a:pPr lvl="0"/>
             <a:r>
-              <a:rPr/>
-              <a:t>применимую норму и её редакцию;</a:t>
+              <a:rPr dirty="0" err="1"/>
+              <a:t>применимую</a:t>
+            </a:r>
+            <a:r>
+              <a:rPr dirty="0"/>
+              <a:t> </a:t>
+            </a:r>
+            <a:r>
+              <a:rPr dirty="0" err="1"/>
+              <a:t>норму</a:t>
+            </a:r>
+            <a:r>
+              <a:rPr dirty="0"/>
+              <a:t> и </a:t>
+            </a:r>
+            <a:r>
+              <a:rPr dirty="0" err="1"/>
+              <a:t>её</a:t>
+            </a:r>
+            <a:r>
+              <a:rPr dirty="0"/>
+              <a:t> </a:t>
+            </a:r>
+            <a:r>
+              <a:rPr dirty="0" err="1"/>
+              <a:t>редакцию</a:t>
+            </a:r>
+            <a:r>
+              <a:rPr dirty="0"/>
+              <a:t>;</a:t>
             </a:r>
           </a:p>
           <a:p>
             <a:pPr lvl="0"/>
             <a:r>
-              <a:rPr/>
-              <a:t>адресата обязанности;</a:t>
+              <a:rPr dirty="0" err="1"/>
+              <a:t>адресата</a:t>
+            </a:r>
+            <a:r>
+              <a:rPr dirty="0"/>
+              <a:t> </a:t>
+            </a:r>
+            <a:r>
+              <a:rPr dirty="0" err="1"/>
+              <a:t>обязанности</a:t>
+            </a:r>
+            <a:r>
+              <a:rPr dirty="0"/>
+              <a:t>;</a:t>
             </a:r>
           </a:p>
           <a:p>
             <a:pPr lvl="0"/>
             <a:r>
-              <a:rPr/>
-              <a:t>подтверждённое действие или бездействие;</a:t>
+              <a:rPr dirty="0" err="1"/>
+              <a:t>подтверждённое</a:t>
+            </a:r>
+            <a:r>
+              <a:rPr dirty="0"/>
+              <a:t> </a:t>
+            </a:r>
+            <a:r>
+              <a:rPr dirty="0" err="1"/>
+              <a:t>действие</a:t>
+            </a:r>
+            <a:r>
+              <a:rPr dirty="0"/>
+              <a:t> </a:t>
+            </a:r>
+            <a:r>
+              <a:rPr dirty="0" err="1"/>
+              <a:t>или</a:t>
+            </a:r>
+            <a:r>
+              <a:rPr dirty="0"/>
+              <a:t> </a:t>
+            </a:r>
+            <a:r>
+              <a:rPr dirty="0" err="1"/>
+              <a:t>бездействие</a:t>
+            </a:r>
+            <a:r>
+              <a:rPr dirty="0"/>
+              <a:t>;</a:t>
             </a:r>
           </a:p>
           <a:p>
             <a:pPr lvl="0"/>
             <a:r>
-              <a:rPr/>
-              <a:t>условия ответственности и возможные исключения;</a:t>
+              <a:rPr dirty="0" err="1"/>
+              <a:t>условия</a:t>
+            </a:r>
+            <a:r>
+              <a:rPr dirty="0"/>
+              <a:t> </a:t>
+            </a:r>
+            <a:r>
+              <a:rPr dirty="0" err="1"/>
+              <a:t>ответственности</a:t>
+            </a:r>
+            <a:r>
+              <a:rPr dirty="0"/>
+              <a:t> и </a:t>
+            </a:r>
+            <a:r>
+              <a:rPr dirty="0" err="1"/>
+              <a:t>возможные</a:t>
+            </a:r>
+            <a:r>
+              <a:rPr dirty="0"/>
+              <a:t> </a:t>
+            </a:r>
+            <a:r>
+              <a:rPr dirty="0" err="1"/>
+              <a:t>исключения</a:t>
+            </a:r>
+            <a:r>
+              <a:rPr dirty="0"/>
+              <a:t>;</a:t>
             </a:r>
           </a:p>
           <a:p>
             <a:pPr lvl="0"/>
             <a:r>
-              <a:rPr/>
-              <a:t>доказательства и компетентного оценщика.</a:t>
-            </a:r>
-          </a:p>
-          <a:p>
-            <a:pPr lvl="0" indent="0" marL="0">
+              <a:rPr dirty="0" err="1"/>
+              <a:t>доказательства</a:t>
+            </a:r>
+            <a:r>
+              <a:rPr dirty="0"/>
+              <a:t> и </a:t>
+            </a:r>
+            <a:r>
+              <a:rPr dirty="0" err="1"/>
+              <a:t>компетен</a:t>
+            </a:r>
+            <a:r>
+              <a:rPr lang="ru-RU" dirty="0" err="1"/>
+              <a:t>ции</a:t>
+            </a:r>
+            <a:r>
+              <a:rPr dirty="0"/>
+              <a:t> </a:t>
+            </a:r>
+            <a:r>
+              <a:rPr dirty="0" err="1"/>
+              <a:t>оценщика</a:t>
+            </a:r>
+            <a:r>
+              <a:rPr dirty="0"/>
+              <a:t>.</a:t>
+            </a:r>
+          </a:p>
+          <a:p>
+            <a:pPr marL="0" lvl="0" indent="0">
               <a:buNone/>
             </a:pPr>
-            <a:r>
-              <a:rPr/>
-              <a:t>Учебный результат: отметить необходимость юридической оценки, а не назначить санкцию.</a:t>
-            </a:r>
+            <a:endParaRPr dirty="0"/>
           </a:p>
         </p:txBody>
       </p:sp>
     </p:spTree>
   </p:cSld>
+  <p:clrMapOvr>
+    <a:masterClrMapping/>
+  </p:clrMapOvr>
 </p:sld>
 </file>
 
@@ -5048,11 +6300,10 @@
           <a:bodyPr/>
           <a:lstStyle/>
           <a:p>
-            <a:pPr lvl="0" indent="0" marL="0">
+            <a:pPr marL="0" lvl="0" indent="0">
               <a:buNone/>
             </a:pPr>
             <a:r>
-              <a:rPr/>
               <a:t>Роли и договоры</a:t>
             </a:r>
           </a:p>
@@ -5073,29 +6324,26 @@
           <a:bodyPr/>
           <a:lstStyle/>
           <a:p>
-            <a:pPr lvl="0" indent="0" marL="0">
+            <a:pPr marL="0" lvl="0" indent="0">
               <a:buNone/>
             </a:pPr>
             <a:r>
-              <a:rPr/>
               <a:t>Договоры, регламенты и должностные обязанности полезны для распределения работ, доступа и доказательств.</a:t>
             </a:r>
           </a:p>
           <a:p>
-            <a:pPr lvl="0" indent="0" marL="0">
+            <a:pPr marL="0" lvl="0" indent="0">
               <a:buNone/>
             </a:pPr>
             <a:r>
-              <a:rPr/>
               <a:t>Но они не заменяют правовую квалификацию и не создают автоматически статус субъекта КИИ или ответственность третьего лица.</a:t>
             </a:r>
           </a:p>
           <a:p>
-            <a:pPr lvl="0" indent="0" marL="0">
+            <a:pPr marL="0" lvl="0" indent="0">
               <a:buNone/>
             </a:pPr>
             <a:r>
-              <a:rPr/>
               <a:t>В карточке и реестре фиксируют владельца действия, границы ответственности и требуемые подтверждения факта.</a:t>
             </a:r>
           </a:p>
@@ -5103,6 +6351,9 @@
       </p:sp>
     </p:spTree>
   </p:cSld>
+  <p:clrMapOvr>
+    <a:masterClrMapping/>
+  </p:clrMapOvr>
 </p:sld>
 </file>
 
@@ -5424,265 +6675,4 @@
   </a:objectDefaults>
   <a:extraClrSchemeLst/>
 </a:theme>
-</file>
-
-<file path=ppt/theme/theme2.xml><?xml version="1.0" encoding="utf-8"?>
-<a:theme xmlns:a="http://schemas.openxmlformats.org/drawingml/2006/main" name="Office Theme">
-  <a:themeElements>
-    <a:clrScheme name="Office">
-      <a:dk1>
-        <a:sysClr val="windowText" lastClr="000000"/>
-      </a:dk1>
-      <a:lt1>
-        <a:sysClr val="window" lastClr="FFFFFF"/>
-      </a:lt1>
-      <a:dk2>
-        <a:srgbClr val="44546A"/>
-      </a:dk2>
-      <a:lt2>
-        <a:srgbClr val="E7E6E6"/>
-      </a:lt2>
-      <a:accent1>
-        <a:srgbClr val="5B9BD5"/>
-      </a:accent1>
-      <a:accent2>
-        <a:srgbClr val="ED7D31"/>
-      </a:accent2>
-      <a:accent3>
-        <a:srgbClr val="A5A5A5"/>
-      </a:accent3>
-      <a:accent4>
-        <a:srgbClr val="FFC000"/>
-      </a:accent4>
-      <a:accent5>
-        <a:srgbClr val="4472C4"/>
-      </a:accent5>
-      <a:accent6>
-        <a:srgbClr val="70AD47"/>
-      </a:accent6>
-      <a:hlink>
-        <a:srgbClr val="0563C1"/>
-      </a:hlink>
-      <a:folHlink>
-        <a:srgbClr val="954F72"/>
-      </a:folHlink>
-    </a:clrScheme>
-    <a:fontScheme name="Office">
-      <a:majorFont>
-        <a:latin typeface="Calibri Light" panose="020F0302020204030204"/>
-        <a:ea typeface=""/>
-        <a:cs typeface=""/>
-        <a:font script="Jpan" typeface="ＭＳ Ｐゴシック"/>
-        <a:font script="Hang" typeface="맑은 고딕"/>
-        <a:font script="Hans" typeface="宋体"/>
-        <a:font script="Hant" typeface="新細明體"/>
-        <a:font script="Arab" typeface="Times New Roman"/>
-        <a:font script="Hebr" typeface="Times New Roman"/>
-        <a:font script="Thai" typeface="Angsana New"/>
-        <a:font script="Ethi" typeface="Nyala"/>
-        <a:font script="Beng" typeface="Vrinda"/>
-        <a:font script="Gujr" typeface="Shruti"/>
-        <a:font script="Khmr" typeface="MoolBoran"/>
-        <a:font script="Knda" typeface="Tunga"/>
-        <a:font script="Guru" typeface="Raavi"/>
-        <a:font script="Cans" typeface="Euphemia"/>
-        <a:font script="Cher" typeface="Plantagenet Cherokee"/>
-        <a:font script="Yiii" typeface="Microsoft Yi Baiti"/>
-        <a:font script="Tibt" typeface="Microsoft Himalaya"/>
-        <a:font script="Thaa" typeface="MV Boli"/>
-        <a:font script="Deva" typeface="Mangal"/>
-        <a:font script="Telu" typeface="Gautami"/>
-        <a:font script="Taml" typeface="Latha"/>
-        <a:font script="Syrc" typeface="Estrangelo Edessa"/>
-        <a:font script="Orya" typeface="Kalinga"/>
-        <a:font script="Mlym" typeface="Kartika"/>
-        <a:font script="Laoo" typeface="DokChampa"/>
-        <a:font script="Sinh" typeface="Iskoola Pota"/>
-        <a:font script="Mong" typeface="Mongolian Baiti"/>
-        <a:font script="Viet" typeface="Times New Roman"/>
-        <a:font script="Uigh" typeface="Microsoft Uighur"/>
-        <a:font script="Geor" typeface="Sylfaen"/>
-      </a:majorFont>
-      <a:minorFont>
-        <a:latin typeface="Calibri" panose="020F0502020204030204"/>
-        <a:ea typeface=""/>
-        <a:cs typeface=""/>
-        <a:font script="Jpan" typeface="ＭＳ Ｐゴシック"/>
-        <a:font script="Hang" typeface="맑은 고딕"/>
-        <a:font script="Hans" typeface="宋体"/>
-        <a:font script="Hant" typeface="新細明體"/>
-        <a:font script="Arab" typeface="Arial"/>
-        <a:font script="Hebr" typeface="Arial"/>
-        <a:font script="Thai" typeface="Cordia New"/>
-        <a:font script="Ethi" typeface="Nyala"/>
-        <a:font script="Beng" typeface="Vrinda"/>
-        <a:font script="Gujr" typeface="Shruti"/>
-        <a:font script="Khmr" typeface="DaunPenh"/>
-        <a:font script="Knda" typeface="Tunga"/>
-        <a:font script="Guru" typeface="Raavi"/>
-        <a:font script="Cans" typeface="Euphemia"/>
-        <a:font script="Cher" typeface="Plantagenet Cherokee"/>
-        <a:font script="Yiii" typeface="Microsoft Yi Baiti"/>
-        <a:font script="Tibt" typeface="Microsoft Himalaya"/>
-        <a:font script="Thaa" typeface="MV Boli"/>
-        <a:font script="Deva" typeface="Mangal"/>
-        <a:font script="Telu" typeface="Gautami"/>
-        <a:font script="Taml" typeface="Latha"/>
-        <a:font script="Syrc" typeface="Estrangelo Edessa"/>
-        <a:font script="Orya" typeface="Kalinga"/>
-        <a:font script="Mlym" typeface="Kartika"/>
-        <a:font script="Laoo" typeface="DokChampa"/>
-        <a:font script="Sinh" typeface="Iskoola Pota"/>
-        <a:font script="Mong" typeface="Mongolian Baiti"/>
-        <a:font script="Viet" typeface="Arial"/>
-        <a:font script="Uigh" typeface="Microsoft Uighur"/>
-        <a:font script="Geor" typeface="Sylfaen"/>
-      </a:minorFont>
-    </a:fontScheme>
-    <a:fmtScheme name="Office">
-      <a:fillStyleLst>
-        <a:solidFill>
-          <a:schemeClr val="phClr"/>
-        </a:solidFill>
-        <a:gradFill rotWithShape="1">
-          <a:gsLst>
-            <a:gs pos="0">
-              <a:schemeClr val="phClr">
-                <a:lumMod val="110000"/>
-                <a:satMod val="105000"/>
-                <a:tint val="67000"/>
-              </a:schemeClr>
-            </a:gs>
-            <a:gs pos="50000">
-              <a:schemeClr val="phClr">
-                <a:lumMod val="105000"/>
-                <a:satMod val="103000"/>
-                <a:tint val="73000"/>
-              </a:schemeClr>
-            </a:gs>
-            <a:gs pos="100000">
-              <a:schemeClr val="phClr">
-                <a:lumMod val="105000"/>
-                <a:satMod val="109000"/>
-                <a:tint val="81000"/>
-              </a:schemeClr>
-            </a:gs>
-          </a:gsLst>
-          <a:lin ang="5400000" scaled="0"/>
-        </a:gradFill>
-        <a:gradFill rotWithShape="1">
-          <a:gsLst>
-            <a:gs pos="0">
-              <a:schemeClr val="phClr">
-                <a:satMod val="103000"/>
-                <a:lumMod val="102000"/>
-                <a:tint val="94000"/>
-              </a:schemeClr>
-            </a:gs>
-            <a:gs pos="50000">
-              <a:schemeClr val="phClr">
-                <a:satMod val="110000"/>
-                <a:lumMod val="100000"/>
-                <a:shade val="100000"/>
-              </a:schemeClr>
-            </a:gs>
-            <a:gs pos="100000">
-              <a:schemeClr val="phClr">
-                <a:lumMod val="99000"/>
-                <a:satMod val="120000"/>
-                <a:shade val="78000"/>
-              </a:schemeClr>
-            </a:gs>
-          </a:gsLst>
-          <a:lin ang="5400000" scaled="0"/>
-        </a:gradFill>
-      </a:fillStyleLst>
-      <a:lnStyleLst>
-        <a:ln w="6350" cap="flat" cmpd="sng" algn="ctr">
-          <a:solidFill>
-            <a:schemeClr val="phClr"/>
-          </a:solidFill>
-          <a:prstDash val="solid"/>
-          <a:miter lim="800000"/>
-        </a:ln>
-        <a:ln w="12700" cap="flat" cmpd="sng" algn="ctr">
-          <a:solidFill>
-            <a:schemeClr val="phClr"/>
-          </a:solidFill>
-          <a:prstDash val="solid"/>
-          <a:miter lim="800000"/>
-        </a:ln>
-        <a:ln w="19050" cap="flat" cmpd="sng" algn="ctr">
-          <a:solidFill>
-            <a:schemeClr val="phClr"/>
-          </a:solidFill>
-          <a:prstDash val="solid"/>
-          <a:miter lim="800000"/>
-        </a:ln>
-      </a:lnStyleLst>
-      <a:effectStyleLst>
-        <a:effectStyle>
-          <a:effectLst/>
-        </a:effectStyle>
-        <a:effectStyle>
-          <a:effectLst/>
-        </a:effectStyle>
-        <a:effectStyle>
-          <a:effectLst>
-            <a:outerShdw blurRad="57150" dist="19050" dir="5400000" algn="ctr" rotWithShape="0">
-              <a:srgbClr val="000000">
-                <a:alpha val="63000"/>
-              </a:srgbClr>
-            </a:outerShdw>
-          </a:effectLst>
-        </a:effectStyle>
-      </a:effectStyleLst>
-      <a:bgFillStyleLst>
-        <a:solidFill>
-          <a:schemeClr val="phClr"/>
-        </a:solidFill>
-        <a:solidFill>
-          <a:schemeClr val="phClr">
-            <a:tint val="95000"/>
-            <a:satMod val="170000"/>
-          </a:schemeClr>
-        </a:solidFill>
-        <a:gradFill rotWithShape="1">
-          <a:gsLst>
-            <a:gs pos="0">
-              <a:schemeClr val="phClr">
-                <a:tint val="93000"/>
-                <a:satMod val="150000"/>
-                <a:shade val="98000"/>
-                <a:lumMod val="102000"/>
-              </a:schemeClr>
-            </a:gs>
-            <a:gs pos="50000">
-              <a:schemeClr val="phClr">
-                <a:tint val="98000"/>
-                <a:satMod val="130000"/>
-                <a:shade val="90000"/>
-                <a:lumMod val="103000"/>
-              </a:schemeClr>
-            </a:gs>
-            <a:gs pos="100000">
-              <a:schemeClr val="phClr">
-                <a:shade val="63000"/>
-                <a:satMod val="120000"/>
-              </a:schemeClr>
-            </a:gs>
-          </a:gsLst>
-          <a:lin ang="5400000" scaled="0"/>
-        </a:gradFill>
-      </a:bgFillStyleLst>
-    </a:fmtScheme>
-  </a:themeElements>
-  <a:objectDefaults/>
-  <a:extraClrSchemeLst/>
-  <a:extLst>
-    <a:ext uri="{05A4C25C-085E-4340-85A3-A5531E510DB2}">
-      <thm15:themeFamily xmlns:thm15="http://schemas.microsoft.com/office/thememl/2012/main" name="Office Theme" id="{62F939B6-93AF-4DB8-9C6B-D6C7DFDC589F}" vid="{4A3C46E8-61CC-4603-A589-7422A47A8E4A}"/>
-    </a:ext>
-  </a:extLst>
-</a:theme>
 </file>